--- a/TEMPLATE_PREENCHIDO_APEX_V_PERFORMA_ENERGY.pptx
+++ b/TEMPLATE_PREENCHIDO_APEX_V_PERFORMA_ENERGY.pptx
@@ -3400,8 +3400,8 @@
         </p:nvSpPr>
         <p:spPr>
           <a:xfrm>
-            <a:off x="141902" y="2424324"/>
-            <a:ext cx="8827204" cy="461665"/>
+            <a:off x="1117600" y="2730500"/>
+            <a:ext cx="10439400" cy="2413000"/>
           </a:xfrm>
           <a:prstGeom prst="rect">
             <a:avLst/>
@@ -3414,10 +3414,80 @@
           </a:bodyPr>
           <a:lstStyle/>
           <a:p>
-            <a:pPr algn="r"/>
-            <a:r>
-              <a:rPr lang="pt-BR" sz="2400" dirty="0"/>
-              <a:t>	</a:t>
+            <a:pPr algn="ctr">
+              <a:buNone/>
+            </a:pPr>
+            <a:r>
+              <a:rPr lang="pt-BR" sz="2000" b="1">
+                <a:solidFill>
+                  <a:srgbClr val="1F497D"/>
+                </a:solidFill>
+              </a:rPr>
+              <a:t>PROJETO DE EXTENSÃO UNIVERSITÁRIA — APEX V (BANCO DE DADOS)</a:t>
+            </a:r>
+          </a:p>
+          <a:p>
+            <a:pPr algn="ctr">
+              <a:spcBef>
+                <a:spcPts val="500"/>
+              </a:spcBef>
+              <a:buNone/>
+            </a:pPr>
+            <a:r>
+              <a:rPr lang="pt-BR" sz="1600" b="0">
+                <a:solidFill>
+                  <a:srgbClr val="595959"/>
+                </a:solidFill>
+              </a:rPr>
+              <a:t>Programa Institucional: Educando para a Cidadania (Resolução CNE/CES nº 7/2018)</a:t>
+            </a:r>
+          </a:p>
+          <a:p>
+            <a:pPr algn="ctr">
+              <a:spcBef>
+                <a:spcPts val="900"/>
+              </a:spcBef>
+              <a:buNone/>
+            </a:pPr>
+            <a:r>
+              <a:rPr lang="pt-BR" sz="1800" b="1">
+                <a:solidFill>
+                  <a:srgbClr val="A33D6B"/>
+                </a:solidFill>
+              </a:rPr>
+              <a:t>1ª ETAPA: PLANEJAMENTO DA EXTENSÃO (MÓDULO 1)</a:t>
+            </a:r>
+          </a:p>
+          <a:p>
+            <a:pPr algn="ctr">
+              <a:spcBef>
+                <a:spcPts val="500"/>
+              </a:spcBef>
+              <a:buNone/>
+            </a:pPr>
+            <a:r>
+              <a:rPr lang="pt-BR" sz="1600" b="0">
+                <a:solidFill>
+                  <a:srgbClr val="262626"/>
+                </a:solidFill>
+              </a:rPr>
+              <a:t>Slides 2 a 6: identificação, ementa, ODS 7, 9 e 12 e local de implementação</a:t>
+            </a:r>
+          </a:p>
+          <a:p>
+            <a:pPr algn="ctr">
+              <a:spcBef>
+                <a:spcPts val="700"/>
+              </a:spcBef>
+              <a:buNone/>
+            </a:pPr>
+            <a:r>
+              <a:rPr lang="pt-BR" sz="1600" b="1">
+                <a:solidFill>
+                  <a:srgbClr val="1F497D"/>
+                </a:solidFill>
+              </a:rPr>
+              <a:t>Empresa parceira: Performa Energy | Ano letivo: 2026</a:t>
             </a:r>
           </a:p>
         </p:txBody>
@@ -3452,72 +3522,34 @@
           <a:p>
             <a:pPr algn="ctr"/>
             <a:r>
-              <a:rPr lang="pt-BR" sz="1800" b="1">
-                <a:solidFill>
-                  <a:srgbClr val="1F497D"/>
-                </a:solidFill>
-              </a:rPr>
-              <a:t>PROJETO DE EXTENSÃO UNIVERSITÁRIA — APEX V (TI)</a:t>
-            </a:r>
-          </a:p>
-          <a:p>
-            <a:pPr algn="ctr">
-              <a:spcBfr>
-                <a:spcPts val="200"/>
-              </a:spcBfr>
-            </a:pPr>
-            <a:r>
-              <a:rPr lang="pt-BR" sz="1300" b="0">
-                <a:solidFill>
-                  <a:srgbClr val="595959"/>
-                </a:solidFill>
-              </a:rPr>
-              <a:t>Programa Institucional: Educando para a Cidadania (Resolução CNE/CES MEC nº 7/2018)</a:t>
-            </a:r>
-          </a:p>
-          <a:p>
-            <a:pPr algn="ctr">
-              <a:spcBfr>
-                <a:spcPts val="300"/>
-              </a:spcBfr>
-            </a:pPr>
-            <a:r>
-              <a:rPr lang="pt-BR" sz="1500" b="1">
-                <a:solidFill>
-                  <a:srgbClr val="A33D6B"/>
-                </a:solidFill>
-              </a:rPr>
-              <a:t>1ª ETAPA: PLANEJAMENTO DA EXTENSÃO (MÓDULO 1)</a:t>
-            </a:r>
-          </a:p>
-          <a:p>
-            <a:pPr algn="ctr">
-              <a:spcBfr>
-                <a:spcPts val="150"/>
-              </a:spcBfr>
-            </a:pPr>
-            <a:r>
-              <a:rPr lang="pt-BR" sz="1200" b="0">
-                <a:solidFill>
-                  <a:srgbClr val="333333"/>
-                </a:solidFill>
-              </a:rPr>
-              <a:t>Envio dos Slides 2 até 6: Identificação, Ementa Oficial, ODS 7, 9 e 13 e Local de Implementação</a:t>
-            </a:r>
-          </a:p>
-          <a:p>
-            <a:pPr algn="ctr">
-              <a:spcBfr>
-                <a:spcPts val="250"/>
-              </a:spcBfr>
-            </a:pPr>
-            <a:r>
-              <a:rPr lang="pt-BR" sz="1200" b="1">
-                <a:solidFill>
-                  <a:srgbClr val="1F497D"/>
-                </a:solidFill>
-              </a:rPr>
-              <a:t>Empresa Parceira: Performa Energy | Ano Letivo: 2026</a:t>
+              <a:rPr lang="pt-BR" sz="2000" i="1" dirty="0">
+                <a:solidFill>
+                  <a:schemeClr val="accent1"/>
+                </a:solidFill>
+              </a:rPr>
+              <a:t>Preencher do slide 2 até o slide 6.</a:t>
+            </a:r>
+            <a:br>
+              <a:rPr lang="pt-BR" sz="2000" i="1" dirty="0">
+                <a:solidFill>
+                  <a:schemeClr val="accent1"/>
+                </a:solidFill>
+              </a:rPr>
+            </a:br>
+            <a:r>
+              <a:rPr lang="pt-BR" sz="2000" i="1" dirty="0">
+                <a:solidFill>
+                  <a:schemeClr val="accent1"/>
+                </a:solidFill>
+              </a:rPr>
+              <a:t>Após o preenchimento, deverá enviar o arquivo no espaço de envio do Módulo 1 na sala de aula. </a:t>
+            </a:r>
+          </a:p>
+          <a:p>
+            <a:pPr algn="ctr"/>
+            <a:r>
+              <a:rPr lang="pt-BR" sz="2000" i="1" dirty="0"/>
+              <a:t> </a:t>
             </a:r>
           </a:p>
         </p:txBody>
@@ -3941,8 +3973,8 @@
         </p:nvSpPr>
         <p:spPr>
           <a:xfrm>
-            <a:off x="1435087" y="3242188"/>
-            <a:ext cx="10082836" cy="2693045"/>
+            <a:off x="1016000" y="1714500"/>
+            <a:ext cx="10287000" cy="4445000"/>
           </a:xfrm>
           <a:prstGeom prst="rect">
             <a:avLst/>
@@ -3955,78 +3987,78 @@
           </a:bodyPr>
           <a:lstStyle/>
           <a:p>
-            <a:pPr>
+            <a:pPr marL="285750" indent="-285750">
+              <a:spcBef>
+                <a:spcPts val="0"/>
+              </a:spcBef>
               <a:buFontTx/>
               <a:buChar char="•"/>
-              <a:spcBfr>
-                <a:spcPts val="80"/>
-              </a:spcBfr>
-            </a:pPr>
-            <a:r>
-              <a:rPr lang="pt-BR" sz="1200" b="1">
-                <a:solidFill>
-                  <a:srgbClr val="1F497D"/>
-                </a:solidFill>
-              </a:rPr>
-              <a:t>Armas de Destruição Matemática (ADMs — Cathy O'Neil): </a:t>
-            </a:r>
-            <a:r>
-              <a:rPr lang="pt-BR" sz="1100" b="0">
+            </a:pPr>
+            <a:r>
+              <a:rPr lang="pt-BR" sz="1600" b="1">
+                <a:solidFill>
+                  <a:srgbClr val="A33D6B"/>
+                </a:solidFill>
+              </a:rPr>
+              <a:t>Modelagem relacional e integridade (Codd, 1970; Silberschatz et al., 2020): </a:t>
+            </a:r>
+            <a:r>
+              <a:rPr lang="pt-BR" sz="1600" b="0">
                 <a:solidFill>
                   <a:srgbClr val="262626"/>
                 </a:solidFill>
               </a:rPr>
-              <a:t>Modelos matemáticos opacos, desregulados e em larga escala que operam como caixas-pretas («black boxes»), retroalimentando desigualdades sob o manto de uma falsa neutralidade matemática. No setor de energia solar, algoritmos preditivos de análise de risco de crédito podem criar filtros invisíveis que excluem consumidores periféricos ou de baixa renda da adesão aos créditos de energia solar, ferindo a justiça socioambiental e o princípio da universalização energética (ODS 7).</a:t>
-            </a:r>
-          </a:p>
-          <a:p>
-            <a:pPr>
+              <a:t>segundo Codd (1970), Date (2004) e Elmasri e Navathe (2018), a consistência vem de modelos relacionais normalizados. O subsistema wa_* (wa_contact, wa_conversation, wa_message, wa_campaign) garante integridade referencial com clientes e faturas.</a:t>
+            </a:r>
+          </a:p>
+          <a:p>
+            <a:pPr marL="285750" indent="-285750">
+              <a:spcBef>
+                <a:spcPts val="700"/>
+              </a:spcBef>
               <a:buFontTx/>
               <a:buChar char="•"/>
-              <a:spcBfr>
-                <a:spcPts val="120"/>
-              </a:spcBfr>
-            </a:pPr>
-            <a:r>
-              <a:rPr lang="pt-BR" sz="1200" b="1">
-                <a:solidFill>
-                  <a:srgbClr val="1F497D"/>
-                </a:solidFill>
-              </a:rPr>
-              <a:t>Capitalismo de Vigilância e Intimidade Energética (Shoshana Zuboff &amp; LGPD): </a:t>
-            </a:r>
-            <a:r>
-              <a:rPr lang="pt-BR" sz="1100" b="0">
+            </a:pPr>
+            <a:r>
+              <a:rPr lang="pt-BR" sz="1600" b="1">
+                <a:solidFill>
+                  <a:srgbClr val="A33D6B"/>
+                </a:solidFill>
+              </a:rPr>
+              <a:t>Grounding determinístico vs. alucinação de IA (Russell; Norvig, 2022; O'Neil, 2020): </a:t>
+            </a:r>
+            <a:r>
+              <a:rPr lang="pt-BR" sz="1600" b="0">
                 <a:solidFill>
                   <a:srgbClr val="262626"/>
                 </a:solidFill>
               </a:rPr>
-              <a:t>Os dados de consumo de uma fatura de energia revelam a intimidade e a rotina do lar (horários de permanência, sazonalidade e perfil socioeconômico). A apropriação desses dados por modelos de terceiros sem consentimento específico constitui vigilância comportamental predatória. A Performa Energy deve atuar com os princípios de Privacy by Design e Security by Default.</a:t>
-            </a:r>
-          </a:p>
-          <a:p>
-            <a:pPr>
+              <a:t>para evitar “armas de destruição matemática” (O'Neil, 2020) e alucinações em dados financeiros, a LLM só conduz o diálogo; valores, encargos e saldos em kWh vêm de consultas SQL determinísticas.</a:t>
+            </a:r>
+          </a:p>
+          <a:p>
+            <a:pPr marL="285750" indent="-285750">
+              <a:spcBef>
+                <a:spcPts val="700"/>
+              </a:spcBef>
               <a:buFontTx/>
               <a:buChar char="•"/>
-              <a:spcBfr>
-                <a:spcPts val="120"/>
-              </a:spcBfr>
-            </a:pPr>
-            <a:r>
-              <a:rPr lang="pt-BR" sz="1200" b="1">
-                <a:solidFill>
-                  <a:srgbClr val="1F497D"/>
-                </a:solidFill>
-              </a:rPr>
-              <a:t>Diretrizes Éticas Globais (UNESCO, 2022 &amp; Luciano Floridi): </a:t>
-            </a:r>
-            <a:r>
-              <a:rPr lang="pt-BR" sz="1100" b="0">
+            </a:pPr>
+            <a:r>
+              <a:rPr lang="pt-BR" sz="1600" b="1">
+                <a:solidFill>
+                  <a:srgbClr val="A33D6B"/>
+                </a:solidFill>
+              </a:rPr>
+              <a:t>Privacidade por design e ética (Floridi, 2023; Meta Platforms, 2026): </a:t>
+            </a:r>
+            <a:r>
+              <a:rPr lang="pt-BR" sz="1600" b="0">
                 <a:solidFill>
                   <a:srgbClr val="262626"/>
                 </a:solidFill>
               </a:rPr>
-              <a:t>Exigência inegociável de explicabilidade algorítmica, auditabilidade contínua de modelos e protagonismo da supervisão humana ativa (human-in-the-loop) para mitigar vieses discriminatórios e garantir a conformidade institucional.</a:t>
+              <a:t>conforme a LGPD (Lei nº 13.709/2018), o sistema adota tokens em variáveis de ambiente, verificação SHA-256 de webhooks e gestão de opt-in/opt-out.</a:t>
             </a:r>
           </a:p>
         </p:txBody>
@@ -4045,8 +4077,8 @@
         </p:nvSpPr>
         <p:spPr>
           <a:xfrm>
-            <a:off x="2213918" y="369590"/>
-            <a:ext cx="10073355" cy="830997"/>
+            <a:off x="2209800" y="368300"/>
+            <a:ext cx="7620000" cy="825500"/>
           </a:xfrm>
           <a:prstGeom prst="rect">
             <a:avLst/>
@@ -4059,14 +4091,16 @@
           </a:bodyPr>
           <a:lstStyle/>
           <a:p>
-            <a:pPr/>
-            <a:r>
-              <a:rPr lang="pt-BR" sz="2200" b="1">
+            <a:pPr>
+              <a:buNone/>
+            </a:pPr>
+            <a:r>
+              <a:rPr lang="pt-BR" sz="2400" b="1">
                 <a:solidFill>
                   <a:srgbClr val="A33D6B"/>
                 </a:solidFill>
               </a:rPr>
-              <a:t>DESAFIO / APROFUNDAMENTO TEÓRICO EM MODELOS ALGORÍTMICOS E ÉTICA</a:t>
+              <a:t>DESAFIO/ QUESTÃO PROBLEMA IDENTIFICADA</a:t>
             </a:r>
           </a:p>
         </p:txBody>
@@ -4085,8 +4119,8 @@
         </p:nvSpPr>
         <p:spPr>
           <a:xfrm>
-            <a:off x="984739" y="1181534"/>
-            <a:ext cx="10920046" cy="1938992"/>
+            <a:off x="977900" y="1143000"/>
+            <a:ext cx="10909300" cy="508000"/>
           </a:xfrm>
           <a:prstGeom prst="rect">
             <a:avLst/>
@@ -4099,14 +4133,16 @@
           </a:bodyPr>
           <a:lstStyle/>
           <a:p>
-            <a:pPr/>
-            <a:r>
-              <a:rPr lang="pt-BR" sz="1500" b="1">
+            <a:pPr>
+              <a:buNone/>
+            </a:pPr>
+            <a:r>
+              <a:rPr lang="pt-BR" sz="1800" b="1">
                 <a:solidFill>
                   <a:schemeClr val="accent1"/>
                 </a:solidFill>
               </a:rPr>
-              <a:t>Armas de Destruição Matemática (Cathy O'Neil), Opacidade e Governança de Dados</a:t>
+              <a:t>Aprofundamento teórico: modelagem relacional, grounding e governança de dados</a:t>
             </a:r>
           </a:p>
         </p:txBody>
@@ -4161,8 +4197,8 @@
         </p:nvSpPr>
         <p:spPr>
           <a:xfrm>
-            <a:off x="164032" y="2710377"/>
-            <a:ext cx="8827204" cy="461665"/>
+            <a:off x="1117600" y="2730500"/>
+            <a:ext cx="10439400" cy="2413000"/>
           </a:xfrm>
           <a:prstGeom prst="rect">
             <a:avLst/>
@@ -4175,10 +4211,64 @@
           </a:bodyPr>
           <a:lstStyle/>
           <a:p>
-            <a:pPr algn="r"/>
-            <a:r>
-              <a:rPr lang="pt-BR" sz="2400" dirty="0"/>
-              <a:t>	</a:t>
+            <a:pPr algn="ctr">
+              <a:buNone/>
+            </a:pPr>
+            <a:r>
+              <a:rPr lang="pt-BR" sz="2000" b="1">
+                <a:solidFill>
+                  <a:srgbClr val="1F497D"/>
+                </a:solidFill>
+              </a:rPr>
+              <a:t>PROJETO DE EXTENSÃO UNIVERSITÁRIA — APEX V (BANCO DE DADOS)</a:t>
+            </a:r>
+          </a:p>
+          <a:p>
+            <a:pPr algn="ctr">
+              <a:spcBef>
+                <a:spcPts val="900"/>
+              </a:spcBef>
+              <a:buNone/>
+            </a:pPr>
+            <a:r>
+              <a:rPr lang="pt-BR" sz="1800" b="1">
+                <a:solidFill>
+                  <a:srgbClr val="A33D6B"/>
+                </a:solidFill>
+              </a:rPr>
+              <a:t>3ª ETAPA: PLANEJAMENTO TÉCNICO-PEDAGÓGICO, PRODUTO FIGMA E IMPACTO</a:t>
+            </a:r>
+          </a:p>
+          <a:p>
+            <a:pPr algn="ctr">
+              <a:spcBef>
+                <a:spcPts val="500"/>
+              </a:spcBef>
+              <a:buNone/>
+            </a:pPr>
+            <a:r>
+              <a:rPr lang="pt-BR" sz="1600" b="0">
+                <a:solidFill>
+                  <a:srgbClr val="262626"/>
+                </a:solidFill>
+              </a:rPr>
+              <a:t>Slides 12 a 19: planejamento pedagógico, cronograma, material educativo digital (Figma), registros, autoavaliação, avaliação da comunidade e referências</a:t>
+            </a:r>
+          </a:p>
+          <a:p>
+            <a:pPr algn="ctr">
+              <a:spcBef>
+                <a:spcPts val="700"/>
+              </a:spcBef>
+              <a:buNone/>
+            </a:pPr>
+            <a:r>
+              <a:rPr lang="pt-BR" sz="1600" b="1">
+                <a:solidFill>
+                  <a:srgbClr val="1F497D"/>
+                </a:solidFill>
+              </a:rPr>
+              <a:t>Empresa parceira: Performa Energy | Ano letivo: 2026</a:t>
             </a:r>
           </a:p>
         </p:txBody>
@@ -4213,72 +4303,34 @@
           <a:p>
             <a:pPr algn="ctr"/>
             <a:r>
-              <a:rPr lang="pt-BR" sz="1800" b="1">
-                <a:solidFill>
-                  <a:srgbClr val="1F497D"/>
-                </a:solidFill>
-              </a:rPr>
-              <a:t>PROJETO DE EXTENSÃO UNIVERSITÁRIA — APEX V (TI)</a:t>
-            </a:r>
-          </a:p>
-          <a:p>
-            <a:pPr algn="ctr">
-              <a:spcBfr>
-                <a:spcPts val="250"/>
-              </a:spcBfr>
-            </a:pPr>
-            <a:r>
-              <a:rPr lang="pt-BR" sz="1500" b="1">
-                <a:solidFill>
-                  <a:srgbClr val="A33D6B"/>
-                </a:solidFill>
-              </a:rPr>
-              <a:t>3ª ETAPA: PLANEJAMENTO PEDAGÓGICO, PRODUTO DIGITAL, AUTOAVALIAÇÃO E IMPACTO</a:t>
-            </a:r>
-          </a:p>
-          <a:p>
-            <a:pPr algn="ctr">
-              <a:spcBfr>
-                <a:spcPts val="150"/>
-              </a:spcBfr>
-            </a:pPr>
-            <a:r>
-              <a:rPr lang="pt-BR" sz="1300" b="0">
-                <a:solidFill>
-                  <a:srgbClr val="595959"/>
-                </a:solidFill>
-              </a:rPr>
-              <a:t>Envio dos Slides 12 até 19 na Sala Virtual da Unyleya (Módulo 3)</a:t>
-            </a:r>
-          </a:p>
-          <a:p>
-            <a:pPr algn="ctr">
-              <a:spcBfr>
-                <a:spcPts val="200"/>
-              </a:spcBfr>
-            </a:pPr>
-            <a:r>
-              <a:rPr lang="pt-BR" sz="1200" b="0">
-                <a:solidFill>
-                  <a:srgbClr val="333333"/>
-                </a:solidFill>
-              </a:rPr>
-              <a:t>Conteúdo: Metodologia Andragógica, Protótipo Figma (Solar AI Ethics &amp; Hub Performa), Registros Fotográficos Presenciais (50 pts), Autoavaliação nas 5 Dimensões e Referências ABNT NBR 6023</a:t>
-            </a:r>
-          </a:p>
-          <a:p>
-            <a:pPr algn="ctr">
-              <a:spcBfr>
-                <a:spcPts val="250"/>
-              </a:spcBfr>
-            </a:pPr>
-            <a:r>
-              <a:rPr lang="pt-BR" sz="1200" b="1">
-                <a:solidFill>
-                  <a:srgbClr val="1F497D"/>
-                </a:solidFill>
-              </a:rPr>
-              <a:t>Empresa Parceira: Performa Energy | Ano Letivo: 2026</a:t>
+              <a:rPr lang="pt-BR" sz="2000" i="1" dirty="0">
+                <a:solidFill>
+                  <a:schemeClr val="accent1"/>
+                </a:solidFill>
+              </a:rPr>
+              <a:t>Preencher do slide 12 até o slide 19.</a:t>
+            </a:r>
+            <a:br>
+              <a:rPr lang="pt-BR" sz="2000" i="1" dirty="0">
+                <a:solidFill>
+                  <a:schemeClr val="accent1"/>
+                </a:solidFill>
+              </a:rPr>
+            </a:br>
+            <a:r>
+              <a:rPr lang="pt-BR" sz="2000" i="1" dirty="0">
+                <a:solidFill>
+                  <a:schemeClr val="accent1"/>
+                </a:solidFill>
+              </a:rPr>
+              <a:t>Após o preenchimento, deverá enviar o arquivo no espaço de envio do Módulo 3 na sala de aula. </a:t>
+            </a:r>
+          </a:p>
+          <a:p>
+            <a:pPr algn="ctr"/>
+            <a:r>
+              <a:rPr lang="pt-BR" sz="2000" i="1" dirty="0"/>
+              <a:t> </a:t>
             </a:r>
           </a:p>
         </p:txBody>
@@ -4612,8 +4664,8 @@
         </p:nvSpPr>
         <p:spPr>
           <a:xfrm>
-            <a:off x="1059322" y="1071432"/>
-            <a:ext cx="10073355" cy="1938992"/>
+            <a:off x="1054100" y="1168400"/>
+            <a:ext cx="10160000" cy="508000"/>
           </a:xfrm>
           <a:prstGeom prst="rect">
             <a:avLst/>
@@ -4626,14 +4678,16 @@
           </a:bodyPr>
           <a:lstStyle/>
           <a:p>
-            <a:pPr/>
-            <a:r>
-              <a:rPr lang="pt-BR" sz="1500" b="1">
+            <a:pPr>
+              <a:buNone/>
+            </a:pPr>
+            <a:r>
+              <a:rPr lang="pt-BR" sz="1800" b="1">
                 <a:solidFill>
                   <a:schemeClr val="accent1"/>
                 </a:solidFill>
               </a:rPr>
-              <a:t>Conteúdos Programáticos, Mídia Digital Escolhida e Metodologia Andragógica</a:t>
+              <a:t>Conteúdos, mídia digital e estratégia metodológica</a:t>
             </a:r>
           </a:p>
         </p:txBody>
@@ -4652,8 +4706,8 @@
         </p:nvSpPr>
         <p:spPr>
           <a:xfrm>
-            <a:off x="2118645" y="362487"/>
-            <a:ext cx="10073355" cy="830997"/>
+            <a:off x="2108200" y="355600"/>
+            <a:ext cx="7620000" cy="825500"/>
           </a:xfrm>
           <a:prstGeom prst="rect">
             <a:avLst/>
@@ -4666,14 +4720,16 @@
           </a:bodyPr>
           <a:lstStyle/>
           <a:p>
-            <a:pPr/>
-            <a:r>
-              <a:rPr lang="pt-BR" sz="2200" b="1">
+            <a:pPr>
+              <a:buNone/>
+            </a:pPr>
+            <a:r>
+              <a:rPr lang="pt-BR" sz="2400" b="1">
                 <a:solidFill>
                   <a:srgbClr val="A33D6B"/>
                 </a:solidFill>
               </a:rPr>
-              <a:t>INFORMAÇÕES ESSENCIAIS SOBRE O PLANEJAMENTO PEDAGÓGICO</a:t>
+              <a:t>INFORMAÇÕES ESSENCIAIS SOBRE O PLANEJAMENTO</a:t>
             </a:r>
           </a:p>
         </p:txBody>
@@ -4782,8 +4838,8 @@
         </p:nvSpPr>
         <p:spPr>
           <a:xfrm>
-            <a:off x="1185635" y="3087394"/>
-            <a:ext cx="10476704" cy="3193951"/>
+            <a:off x="1054100" y="1714500"/>
+            <a:ext cx="10160000" cy="4445000"/>
           </a:xfrm>
           <a:prstGeom prst="rect">
             <a:avLst/>
@@ -4796,78 +4852,78 @@
           </a:bodyPr>
           <a:lstStyle/>
           <a:p>
-            <a:pPr>
+            <a:pPr marL="285750" indent="-285750">
+              <a:spcBef>
+                <a:spcPts val="0"/>
+              </a:spcBef>
               <a:buFontTx/>
               <a:buChar char="•"/>
-              <a:spcBfr>
-                <a:spcPts val="80"/>
-              </a:spcBfr>
-            </a:pPr>
-            <a:r>
-              <a:rPr lang="pt-BR" sz="1200" b="1">
-                <a:solidFill>
-                  <a:srgbClr val="1F497D"/>
-                </a:solidFill>
-              </a:rPr>
-              <a:t>Conteúdos Abordados na Intervenção Extensionista: </a:t>
-            </a:r>
-            <a:r>
-              <a:rPr lang="pt-BR" sz="1100" b="0">
+            </a:pPr>
+            <a:r>
+              <a:rPr lang="pt-BR" sz="1600" b="1">
+                <a:solidFill>
+                  <a:srgbClr val="A33D6B"/>
+                </a:solidFill>
+              </a:rPr>
+              <a:t>Conteúdos a serem abordados: </a:t>
+            </a:r>
+            <a:r>
+              <a:rPr lang="pt-BR" sz="1600" b="0">
                 <a:solidFill>
                   <a:srgbClr val="262626"/>
                 </a:solidFill>
               </a:rPr>
-              <a:t>1. Arquitetura dos Modelos de IA Generativa e Limitações Probabilísticas: Compreensão da origem das alucinações em dados numéricos e tabelas de faturas; 2. Higienização de Dados e Compliance com a LGPD: Protocolos práticos para mascaramento de CPF, nomes e códigos de instalação em contas de luz; 3. Engenharia de Prompts Estruturados para o Setor Solar: Construção de instruções com salvaguardas normativas da Lei 14.300/2022 e ANEEL nº 1.000/2021; 4. Governança Operacional: Apresentação e treinamento na utilização do Hub no Figma.</a:t>
-            </a:r>
-          </a:p>
-          <a:p>
-            <a:pPr>
+              <a:t>arquitetura de dados de mensageria (subsistema wa_* no MySQL); operação do agente de cobrança (identificação por CPF, consulta em tempo real, multa rescisória e saldo CEMIG em kWh); tratamento padronizado de contestações; governança, alçada de negociação e transbordo humano.</a:t>
+            </a:r>
+          </a:p>
+          <a:p>
+            <a:pPr marL="285750" indent="-285750">
+              <a:spcBef>
+                <a:spcPts val="700"/>
+              </a:spcBef>
               <a:buFontTx/>
               <a:buChar char="•"/>
-              <a:spcBfr>
-                <a:spcPts val="120"/>
-              </a:spcBfr>
-            </a:pPr>
-            <a:r>
-              <a:rPr lang="pt-BR" sz="1200" b="1">
-                <a:solidFill>
-                  <a:srgbClr val="1F497D"/>
-                </a:solidFill>
-              </a:rPr>
-              <a:t>Mídia Digital Desenvolvida (Figma): </a:t>
-            </a:r>
-            <a:r>
-              <a:rPr lang="pt-BR" sz="1100" b="0">
+            </a:pPr>
+            <a:r>
+              <a:rPr lang="pt-BR" sz="1600" b="1">
+                <a:solidFill>
+                  <a:srgbClr val="A33D6B"/>
+                </a:solidFill>
+              </a:rPr>
+              <a:t>Mídia digital a ser desenvolvida: </a:t>
+            </a:r>
+            <a:r>
+              <a:rPr lang="pt-BR" sz="1600" b="0">
                 <a:solidFill>
                   <a:srgbClr val="262626"/>
                 </a:solidFill>
               </a:rPr>
-              <a:t>Protótipo interativo de alta fidelidade desenvolvido no software Figma («Solar AI Ethics &amp; Hub Performa»), estruturado em conformidade com padrões de acessibilidade WCAG AAA, reunindo módulos de simulação, checklist de auditoria e guia de bolso corporativo.</a:t>
-            </a:r>
-          </a:p>
-          <a:p>
-            <a:pPr>
+              <a:t>protótipo navegável no Figma da nova aba «Atendimento» do CRM Performalog, com tela de chat, Ficha 360° do cliente e console da régua de cobrança.</a:t>
+            </a:r>
+          </a:p>
+          <a:p>
+            <a:pPr marL="285750" indent="-285750">
+              <a:spcBef>
+                <a:spcPts val="700"/>
+              </a:spcBef>
               <a:buFontTx/>
               <a:buChar char="•"/>
-              <a:spcBfr>
-                <a:spcPts val="120"/>
-              </a:spcBfr>
-            </a:pPr>
-            <a:r>
-              <a:rPr lang="pt-BR" sz="1200" b="1">
-                <a:solidFill>
-                  <a:srgbClr val="1F497D"/>
-                </a:solidFill>
-              </a:rPr>
-              <a:t>Estratégia Metodológica Ativa e Andragógica: </a:t>
-            </a:r>
-            <a:r>
-              <a:rPr lang="pt-BR" sz="1100" b="0">
+            </a:pPr>
+            <a:r>
+              <a:rPr lang="pt-BR" sz="1600" b="1">
+                <a:solidFill>
+                  <a:srgbClr val="A33D6B"/>
+                </a:solidFill>
+              </a:rPr>
+              <a:t>Estratégia metodológica: </a:t>
+            </a:r>
+            <a:r>
+              <a:rPr lang="pt-BR" sz="1600" b="0">
                 <a:solidFill>
                   <a:srgbClr val="262626"/>
                 </a:solidFill>
               </a:rPr>
-              <a:t>Andragogia de Malcolm Knowles focada nas necessidades práticas dos profissionais adultos, aliada à Aprendizagem Baseada em Problemas (PBL) com estudos de casos reais de faturas e dinâmicas hands-on de prompt engineering seguro com supervisão humana.</a:t>
+              <a:t>andragogia (Knowles; Holton III; Swanson, 2009): aprendizagem experiencial centrada em problemas reais, com simulação de atendimentos e testes de transbordo no protótipo.</a:t>
             </a:r>
           </a:p>
         </p:txBody>
@@ -4930,8 +4986,8 @@
         </p:nvSpPr>
         <p:spPr>
           <a:xfrm>
-            <a:off x="1059322" y="1071432"/>
-            <a:ext cx="10073355" cy="1938992"/>
+            <a:off x="1054100" y="1168400"/>
+            <a:ext cx="10160000" cy="508000"/>
           </a:xfrm>
           <a:prstGeom prst="rect">
             <a:avLst/>
@@ -4944,14 +5000,16 @@
           </a:bodyPr>
           <a:lstStyle/>
           <a:p>
-            <a:pPr/>
-            <a:r>
-              <a:rPr lang="pt-BR" sz="1500" b="1">
+            <a:pPr>
+              <a:buNone/>
+            </a:pPr>
+            <a:r>
+              <a:rPr lang="pt-BR" sz="1800" b="1">
                 <a:solidFill>
                   <a:schemeClr val="accent1"/>
                 </a:solidFill>
               </a:rPr>
-              <a:t>Etapas Passo a Passo, Responsáveis e Cronograma Integrado de 6 Semanas</a:t>
+              <a:t>Etapas, responsáveis e cronograma integrado de 6 semanas</a:t>
             </a:r>
           </a:p>
         </p:txBody>
@@ -4970,8 +5028,8 @@
         </p:nvSpPr>
         <p:spPr>
           <a:xfrm>
-            <a:off x="2118645" y="362487"/>
-            <a:ext cx="10073355" cy="830997"/>
+            <a:off x="2108200" y="355600"/>
+            <a:ext cx="7620000" cy="825500"/>
           </a:xfrm>
           <a:prstGeom prst="rect">
             <a:avLst/>
@@ -4984,14 +5042,16 @@
           </a:bodyPr>
           <a:lstStyle/>
           <a:p>
-            <a:pPr/>
-            <a:r>
-              <a:rPr lang="pt-BR" sz="2200" b="1">
+            <a:pPr>
+              <a:buNone/>
+            </a:pPr>
+            <a:r>
+              <a:rPr lang="pt-BR" sz="2400" b="1">
                 <a:solidFill>
                   <a:srgbClr val="A33D6B"/>
                 </a:solidFill>
               </a:rPr>
-              <a:t>INFORMAÇÕES ESSENCIAIS SOBRE O PLANEJAMENTO PEDAGÓGICO</a:t>
+              <a:t>INFORMAÇÕES ESSENCIAIS SOBRE O PLANEJAMENTO</a:t>
             </a:r>
           </a:p>
         </p:txBody>
@@ -5100,8 +5160,8 @@
         </p:nvSpPr>
         <p:spPr>
           <a:xfrm>
-            <a:off x="1185635" y="3157732"/>
-            <a:ext cx="10476704" cy="2175980"/>
+            <a:off x="1054100" y="1714500"/>
+            <a:ext cx="10160000" cy="4445000"/>
           </a:xfrm>
           <a:prstGeom prst="rect">
             <a:avLst/>
@@ -5114,153 +5174,153 @@
           </a:bodyPr>
           <a:lstStyle/>
           <a:p>
-            <a:pPr>
+            <a:pPr marL="285750" indent="-285750">
+              <a:spcBef>
+                <a:spcPts val="0"/>
+              </a:spcBef>
               <a:buFontTx/>
               <a:buChar char="•"/>
-              <a:spcBfr>
-                <a:spcPts val="60"/>
-              </a:spcBfr>
-            </a:pPr>
-            <a:r>
-              <a:rPr lang="pt-BR" sz="1200" b="1">
-                <a:solidFill>
-                  <a:srgbClr val="1F497D"/>
-                </a:solidFill>
-              </a:rPr>
-              <a:t>Semana 1 — Diagnóstico Situacional e Acordo Institucional: </a:t>
-            </a:r>
-            <a:r>
-              <a:rPr lang="pt-BR" sz="1100" b="0">
+            </a:pPr>
+            <a:r>
+              <a:rPr lang="pt-BR" sz="1600" b="1">
+                <a:solidFill>
+                  <a:srgbClr val="A33D6B"/>
+                </a:solidFill>
+              </a:rPr>
+              <a:t>Semana 1 — Diagnóstico de dados: </a:t>
+            </a:r>
+            <a:r>
+              <a:rPr lang="pt-BR" sz="1600" b="0">
                 <a:solidFill>
                   <a:srgbClr val="262626"/>
                 </a:solidFill>
               </a:rPr>
-              <a:t>Mapeamento dos fluxos operacionais na Performa Energy, entrevistas com gestores e levantamento de gargalos de Shadow AI. (Resp: Discente Extensionista e Coordenação Performa)</a:t>
-            </a:r>
-          </a:p>
-          <a:p>
-            <a:pPr>
+              <a:t>levantamento dos relatórios da CEMIG e das faturas da Digital Grid no MySQL. (Discente e TI)</a:t>
+            </a:r>
+          </a:p>
+          <a:p>
+            <a:pPr marL="285750" indent="-285750">
+              <a:spcBef>
+                <a:spcPts val="500"/>
+              </a:spcBef>
               <a:buFontTx/>
               <a:buChar char="•"/>
-              <a:spcBfr>
-                <a:spcPts val="80"/>
-              </a:spcBfr>
-            </a:pPr>
-            <a:r>
-              <a:rPr lang="pt-BR" sz="1200" b="1">
-                <a:solidFill>
-                  <a:srgbClr val="1F497D"/>
-                </a:solidFill>
-              </a:rPr>
-              <a:t>Semana 2 — Pesquisa Bibliográfica e Marco Conceitual (ODS): </a:t>
-            </a:r>
-            <a:r>
-              <a:rPr lang="pt-BR" sz="1100" b="0">
+            </a:pPr>
+            <a:r>
+              <a:rPr lang="pt-BR" sz="1600" b="1">
+                <a:solidFill>
+                  <a:srgbClr val="A33D6B"/>
+                </a:solidFill>
+              </a:rPr>
+              <a:t>Semana 2 — Modelagem relacional: </a:t>
+            </a:r>
+            <a:r>
+              <a:rPr lang="pt-BR" sz="1600" b="0">
                 <a:solidFill>
                   <a:srgbClr val="262626"/>
                 </a:solidFill>
               </a:rPr>
-              <a:t>Pesquisa sobre IA ética, regulação da energia solar e elaboração/submissão da Etapa 1 do Template PPTX. (Resp: Discente Extensionista)</a:t>
-            </a:r>
-          </a:p>
-          <a:p>
-            <a:pPr>
+              <a:t>especificação das tabelas wa_* e envio da 1ª etapa no AVA. (Discente)</a:t>
+            </a:r>
+          </a:p>
+          <a:p>
+            <a:pPr marL="285750" indent="-285750">
+              <a:spcBef>
+                <a:spcPts val="500"/>
+              </a:spcBef>
               <a:buFontTx/>
               <a:buChar char="•"/>
-              <a:spcBfr>
-                <a:spcPts val="80"/>
-              </a:spcBfr>
-            </a:pPr>
-            <a:r>
-              <a:rPr lang="pt-BR" sz="1200" b="1">
-                <a:solidFill>
-                  <a:srgbClr val="1F497D"/>
-                </a:solidFill>
-              </a:rPr>
-              <a:t>Semana 3 — Análise de Riscos Algorítmicos e LGPD: </a:t>
-            </a:r>
-            <a:r>
-              <a:rPr lang="pt-BR" sz="1100" b="0">
+            </a:pPr>
+            <a:r>
+              <a:rPr lang="pt-BR" sz="1600" b="1">
+                <a:solidFill>
+                  <a:srgbClr val="A33D6B"/>
+                </a:solidFill>
+              </a:rPr>
+              <a:t>Semana 3 — Regras do agente de cobrança: </a:t>
+            </a:r>
+            <a:r>
+              <a:rPr lang="pt-BR" sz="1600" b="0">
                 <a:solidFill>
                   <a:srgbClr val="262626"/>
                 </a:solidFill>
               </a:rPr>
-              <a:t>Estruturação dos conceitos de ADMs de Cathy O'Neil aplicados a faturas e submissão da Etapa 2 do Template PPTX. (Resp: Discente Extensionista)</a:t>
-            </a:r>
-          </a:p>
-          <a:p>
-            <a:pPr>
+              <a:t>estruturação das categorias de contestação e das réguas de negociação; envio da 2ª etapa no AVA. (Discente)</a:t>
+            </a:r>
+          </a:p>
+          <a:p>
+            <a:pPr marL="285750" indent="-285750">
+              <a:spcBef>
+                <a:spcPts val="500"/>
+              </a:spcBef>
               <a:buFontTx/>
               <a:buChar char="•"/>
-              <a:spcBfr>
-                <a:spcPts val="80"/>
-              </a:spcBfr>
-            </a:pPr>
-            <a:r>
-              <a:rPr lang="pt-BR" sz="1200" b="1">
-                <a:solidFill>
-                  <a:srgbClr val="1F497D"/>
-                </a:solidFill>
-              </a:rPr>
-              <a:t>Semana 4 — Certificação iTalents e Design do Hub no Figma: </a:t>
-            </a:r>
-            <a:r>
-              <a:rPr lang="pt-BR" sz="1100" b="0">
+            </a:pPr>
+            <a:r>
+              <a:rPr lang="pt-BR" sz="1600" b="1">
+                <a:solidFill>
+                  <a:srgbClr val="A33D6B"/>
+                </a:solidFill>
+              </a:rPr>
+              <a:t>Semana 4 — Certificação iTalents e Figma: </a:t>
+            </a:r>
+            <a:r>
+              <a:rPr lang="pt-BR" sz="1600" b="0">
                 <a:solidFill>
                   <a:srgbClr val="262626"/>
                 </a:solidFill>
               </a:rPr>
-              <a:t>Conclusão do curso de Design de Interfaces (iTalents) e desenvolvimento do protótipo interativo «Solar AI Ethics &amp; Hub Performa». (Resp: Discente Extensionista)</a:t>
-            </a:r>
-          </a:p>
-          <a:p>
-            <a:pPr>
+              <a:t>conclusão do curso de Figma e construção das telas navegáveis da aba Atendimento. (Discente)</a:t>
+            </a:r>
+          </a:p>
+          <a:p>
+            <a:pPr marL="285750" indent="-285750">
+              <a:spcBef>
+                <a:spcPts val="500"/>
+              </a:spcBef>
               <a:buFontTx/>
               <a:buChar char="•"/>
-              <a:spcBfr>
-                <a:spcPts val="80"/>
-              </a:spcBfr>
-            </a:pPr>
-            <a:r>
-              <a:rPr lang="pt-BR" sz="1200" b="1">
-                <a:solidFill>
-                  <a:srgbClr val="1F497D"/>
-                </a:solidFill>
-              </a:rPr>
-              <a:t>Semana 5 — Intervenção Presencial na Performa Energy: </a:t>
-            </a:r>
-            <a:r>
-              <a:rPr lang="pt-BR" sz="1100" b="0">
+            </a:pPr>
+            <a:r>
+              <a:rPr lang="pt-BR" sz="1600" b="1">
+                <a:solidFill>
+                  <a:srgbClr val="A33D6B"/>
+                </a:solidFill>
+              </a:rPr>
+              <a:t>Semana 5 — Intervenção presencial: </a:t>
+            </a:r>
+            <a:r>
+              <a:rPr lang="pt-BR" sz="1600" b="0">
                 <a:solidFill>
                   <a:srgbClr val="262626"/>
                 </a:solidFill>
               </a:rPr>
-              <a:t>Realização da oficina presencial (90 min) na sala de reuniões, testes hands-on e registro das 3 fotos obrigatórias. (Resp: Discente e Equipe Corporativa)</a:t>
-            </a:r>
-          </a:p>
-          <a:p>
-            <a:pPr>
+              <a:t>oficina na Performa Energy, testes com a equipe e registro das 3 fotos obrigatórias. (Discente e colaboradores)</a:t>
+            </a:r>
+          </a:p>
+          <a:p>
+            <a:pPr marL="285750" indent="-285750">
+              <a:spcBef>
+                <a:spcPts val="500"/>
+              </a:spcBef>
               <a:buFontTx/>
               <a:buChar char="•"/>
-              <a:spcBfr>
-                <a:spcPts val="80"/>
-              </a:spcBfr>
-            </a:pPr>
-            <a:r>
-              <a:rPr lang="pt-BR" sz="1200" b="1">
-                <a:solidFill>
-                  <a:srgbClr val="1F497D"/>
-                </a:solidFill>
-              </a:rPr>
-              <a:t>Semana 6 — Avaliação de Impacto e Submissão Final: </a:t>
-            </a:r>
-            <a:r>
-              <a:rPr lang="pt-BR" sz="1100" b="0">
+            </a:pPr>
+            <a:r>
+              <a:rPr lang="pt-BR" sz="1600" b="1">
+                <a:solidFill>
+                  <a:srgbClr val="A33D6B"/>
+                </a:solidFill>
+              </a:rPr>
+              <a:t>Semana 6 — Avaliação e entrega final: </a:t>
+            </a:r>
+            <a:r>
+              <a:rPr lang="pt-BR" sz="1600" b="0">
                 <a:solidFill>
                   <a:srgbClr val="262626"/>
                 </a:solidFill>
               </a:rPr>
-              <a:t>Tabulação dos formulários Likert, redação da autoavaliação e entrega final do Template PPTX e link do Figma. (Resp: Discente Extensionista)</a:t>
+              <a:t>tabulação dos questionários Likert, autoavaliação nas 5 dimensões e entrega de slides, certificado e link do Figma. (Discente)</a:t>
             </a:r>
           </a:p>
         </p:txBody>
@@ -5323,8 +5383,8 @@
         </p:nvSpPr>
         <p:spPr>
           <a:xfrm>
-            <a:off x="2118645" y="417104"/>
-            <a:ext cx="10073355" cy="1138773"/>
+            <a:off x="2108200" y="406400"/>
+            <a:ext cx="7620000" cy="762000"/>
           </a:xfrm>
           <a:prstGeom prst="rect">
             <a:avLst/>
@@ -5337,14 +5397,16 @@
           </a:bodyPr>
           <a:lstStyle/>
           <a:p>
-            <a:pPr/>
-            <a:r>
-              <a:rPr lang="pt-BR" sz="2200" b="1">
+            <a:pPr>
+              <a:buNone/>
+            </a:pPr>
+            <a:r>
+              <a:rPr lang="pt-BR" sz="2400" b="1">
                 <a:solidFill>
                   <a:srgbClr val="A33D6B"/>
                 </a:solidFill>
               </a:rPr>
-              <a:t>MATERIAL EDUCATIVO DIGITAL — SOLAR AI ETHICS &amp; HUB PERFORMA</a:t>
+              <a:t>MATERIAL EDUCATIVO DIGITAL</a:t>
             </a:r>
           </a:p>
         </p:txBody>
@@ -5453,8 +5515,8 @@
         </p:nvSpPr>
         <p:spPr>
           <a:xfrm>
-            <a:off x="1399634" y="1317827"/>
-            <a:ext cx="9608677" cy="779444"/>
+            <a:off x="1066800" y="1244600"/>
+            <a:ext cx="10414000" cy="3048000"/>
           </a:xfrm>
           <a:prstGeom prst="rect">
             <a:avLst/>
@@ -5467,163 +5529,60 @@
           </a:bodyPr>
           <a:lstStyle/>
           <a:p>
-            <a:pPr/>
-            <a:r>
-              <a:rPr lang="pt-BR" sz="1400" b="1">
+            <a:pPr>
+              <a:buNone/>
+            </a:pPr>
+            <a:r>
+              <a:rPr lang="pt-BR" sz="1800" b="1">
                 <a:solidFill>
                   <a:schemeClr val="accent1"/>
                 </a:solidFill>
               </a:rPr>
-              <a:t>Apresentação da Solução Digital Desenvolvida no Figma e Orientações de Uso Corporativo</a:t>
+              <a:t>Protótipo navegável «Performalog Atendimento» (Figma)</a:t>
             </a:r>
           </a:p>
           <a:p>
             <a:pPr>
-              <a:spcBfr>
-                <a:spcPts val="100"/>
-              </a:spcBfr>
-            </a:pPr>
-            <a:r>
-              <a:rPr lang="pt-BR" sz="1100" b="0">
+              <a:spcBef>
+                <a:spcPts val="900"/>
+              </a:spcBef>
+              <a:buNone/>
+            </a:pPr>
+            <a:r>
+              <a:rPr lang="pt-BR" sz="1800" b="0">
                 <a:solidFill>
                   <a:srgbClr val="262626"/>
                 </a:solidFill>
               </a:rPr>
-              <a:t>O «Solar AI Ethics &amp; Hub Performa» é uma plataforma digital interativa concebida para capacitar continuamente analistas de faturamento e consultores da Performa Energy no tratamento ético de dados e prevenção de alucinações tarifárias.</a:t>
+              <a:t>Propõe-se um protótipo navegável de alta fidelidade que representa a integração da WhatsApp Cloud API ao CRM Performalog, oferecendo à equipe uma interface única para supervisionar o agente inteligente, negociar dívidas e dar suporte técnico.</a:t>
             </a:r>
           </a:p>
           <a:p>
             <a:pPr>
-              <a:spcBfr>
-                <a:spcPts val="100"/>
-              </a:spcBfr>
-            </a:pPr>
-            <a:r>
-              <a:rPr lang="pt-BR" sz="1050" b="0" i="1">
-                <a:solidFill>
-                  <a:srgbClr val="595959"/>
-                </a:solidFill>
-              </a:rPr>
-              <a:t>Orientações de Uso: Interface responsiva acessível via navegadores desktop e móveis corporativos. Navegação baseada em 5 fluxos práticos: Diagnóstico LGPD, Sanitizador de Faturas, Simulador de Prompts Seguros, Validador Human-in-the-Loop e Cheat Sheet.</a:t>
-            </a:r>
-          </a:p>
-        </p:txBody>
-      </p:sp>
-      <p:pic>
-        <p:nvPicPr>
-          <p:cNvPr id="2" name="Espaço Reservado para Conteúdo 20" descr="Interface gráfica do usuário, Aplicativo&#10;&#10;Descrição gerada automaticamente">
-            <a:extLst>
-              <a:ext uri="{FF2B5EF4-FFF2-40B4-BE49-F238E27FC236}">
-                <ns3:creationId id="{A074007E-07A6-B0CB-6563-54AAC9413250}"/>
-              </a:ext>
-            </a:extLst>
-          </p:cNvPr>
-          <p:cNvPicPr>
-            <a:picLocks noGrp="1" noChangeAspect="1"/>
-          </p:cNvPicPr>
-          <p:nvPr>
-            <p:ph idx="1"/>
-          </p:nvPr>
-        </p:nvPicPr>
-        <p:blipFill rotWithShape="1">
-          <a:blip r:embed="rId4"/>
-          <a:srcRect t="3381"/>
-          <a:stretch/>
-        </p:blipFill>
-        <p:spPr>
-          <a:xfrm>
-            <a:off x="669818" y="2378230"/>
-            <a:ext cx="1984733" cy="2973084"/>
-          </a:xfrm>
-        </p:spPr>
-      </p:pic>
-      <p:pic>
-        <p:nvPicPr>
-          <p:cNvPr id="5" name="Espaço Reservado para Conteúdo 4" descr="Interface gráfica do usuário, Texto, Aplicativo&#10;&#10;Descrição gerada automaticamente">
-            <a:extLst>
-              <a:ext uri="{FF2B5EF4-FFF2-40B4-BE49-F238E27FC236}">
-                <ns3:creationId id="{E644FA29-A9E7-FF16-D748-CB75FF6220EF}"/>
-              </a:ext>
-            </a:extLst>
-          </p:cNvPr>
-          <p:cNvPicPr>
-            <a:picLocks noChangeAspect="1"/>
-          </p:cNvPicPr>
-          <p:nvPr/>
-        </p:nvPicPr>
-        <p:blipFill rotWithShape="1">
-          <a:blip r:embed="rId5"/>
-          <a:srcRect t="3884"/>
-          <a:stretch/>
-        </p:blipFill>
-        <p:spPr>
-          <a:xfrm>
-            <a:off x="2118645" y="3060324"/>
-            <a:ext cx="1984733" cy="3244966"/>
-          </a:xfrm>
-          <a:prstGeom prst="rect">
-            <a:avLst/>
-          </a:prstGeom>
-        </p:spPr>
-      </p:pic>
-      <p:pic>
-        <p:nvPicPr>
-          <p:cNvPr id="8" name="Imagem 7" descr="Interface gráfica do usuário, Texto, Aplicativo&#10;&#10;Descrição gerada automaticamente">
-            <a:extLst>
-              <a:ext uri="{FF2B5EF4-FFF2-40B4-BE49-F238E27FC236}">
-                <ns3:creationId id="{61993FDD-D71F-FD73-C70A-DE42F19CB0A4}"/>
-              </a:ext>
-            </a:extLst>
-          </p:cNvPr>
-          <p:cNvPicPr>
-            <a:picLocks noChangeAspect="1"/>
-          </p:cNvPicPr>
-          <p:nvPr/>
-        </p:nvPicPr>
-        <p:blipFill rotWithShape="1">
-          <a:blip r:embed="rId6"/>
-          <a:srcRect t="2051" b="5641"/>
-          <a:stretch/>
-        </p:blipFill>
-        <p:spPr>
-          <a:xfrm>
-            <a:off x="3681394" y="2378230"/>
-            <a:ext cx="2180417" cy="3161943"/>
-          </a:xfrm>
-          <a:prstGeom prst="rect">
-            <a:avLst/>
-          </a:prstGeom>
-        </p:spPr>
-      </p:pic>
-      <p:pic>
-        <p:nvPicPr>
-          <p:cNvPr id="9" name="Espaço Reservado para Conteúdo 5" descr="Desenho de uma pessoa&#10;&#10;Descrição gerada automaticamente com confiança baixa">
-            <a:extLst>
-              <a:ext uri="{FF2B5EF4-FFF2-40B4-BE49-F238E27FC236}">
-                <ns3:creationId id="{326228BD-F289-F813-BBFE-B006F25AB51A}"/>
-              </a:ext>
-            </a:extLst>
-          </p:cNvPr>
-          <p:cNvPicPr>
-            <a:picLocks noChangeAspect="1"/>
-          </p:cNvPicPr>
-          <p:nvPr/>
-        </p:nvPicPr>
-        <p:blipFill rotWithShape="1">
-          <a:blip r:embed="rId7"/>
-          <a:srcRect t="3698" b="5042"/>
-          <a:stretch/>
-        </p:blipFill>
-        <p:spPr>
-          <a:xfrm>
-            <a:off x="5423346" y="2987602"/>
-            <a:ext cx="1984733" cy="3362487"/>
-          </a:xfrm>
-          <a:prstGeom prst="rect">
-            <a:avLst/>
-          </a:prstGeom>
-        </p:spPr>
-      </p:pic>
+              <a:spcBef>
+                <a:spcPts val="900"/>
+              </a:spcBef>
+              <a:buNone/>
+            </a:pPr>
+            <a:r>
+              <a:rPr lang="pt-BR" sz="1800" b="1">
+                <a:solidFill>
+                  <a:srgbClr val="A33D6B"/>
+                </a:solidFill>
+              </a:rPr>
+              <a:t>Orientações de uso: </a:t>
+            </a:r>
+            <a:r>
+              <a:rPr lang="pt-BR" sz="1800" b="0">
+                <a:solidFill>
+                  <a:srgbClr val="262626"/>
+                </a:solidFill>
+              </a:rPr>
+              <a:t>o protótipo será acessado pelo navegador, por link público, com perfis diferenciados (Admin, Cobrança e Sucesso do Cliente), modo claro e escuro, console da API e simulador móvel para testes de ponta a ponta.</a:t>
+            </a:r>
+          </a:p>
+        </p:txBody>
+      </p:sp>
       <p:sp>
         <p:nvSpPr>
           <p:cNvPr id="10" name="CaixaDeTexto 9">
@@ -5638,8 +5597,8 @@
         </p:nvSpPr>
         <p:spPr>
           <a:xfrm>
-            <a:off x="7603763" y="3685975"/>
-            <a:ext cx="4250237" cy="646331"/>
+            <a:off x="1066800" y="4876800"/>
+            <a:ext cx="9906000" cy="406400"/>
           </a:xfrm>
           <a:prstGeom prst="rect">
             <a:avLst/>
@@ -5652,14 +5611,16 @@
           </a:bodyPr>
           <a:lstStyle/>
           <a:p>
-            <a:pPr algn="ctr"/>
-            <a:r>
-              <a:rPr lang="pt-BR" sz="1500" b="1">
+            <a:pPr>
+              <a:buNone/>
+            </a:pPr>
+            <a:r>
+              <a:rPr lang="pt-BR" sz="1600" b="1">
                 <a:solidFill>
                   <a:srgbClr val="0070C0"/>
                 </a:solidFill>
               </a:rPr>
-              <a:t>https://www.figma.com/proto/solar-ai-ethics-performa</a:t>
+              <a:t>https://www.figma.com/proto/performalog-atendimento-cobranca</a:t>
             </a:r>
           </a:p>
         </p:txBody>
@@ -5678,8 +5639,8 @@
         </p:nvSpPr>
         <p:spPr>
           <a:xfrm>
-            <a:off x="7765287" y="3373119"/>
-            <a:ext cx="3567998" cy="358816"/>
+            <a:off x="1066800" y="4470400"/>
+            <a:ext cx="9906000" cy="381000"/>
           </a:xfrm>
           <a:prstGeom prst="rect">
             <a:avLst/>
@@ -5692,9 +5653,11 @@
           </a:bodyPr>
           <a:lstStyle/>
           <a:p>
-            <a:pPr/>
-            <a:r>
-              <a:rPr lang="pt-BR" sz="1300" b="1">
+            <a:pPr>
+              <a:buNone/>
+            </a:pPr>
+            <a:r>
+              <a:rPr lang="pt-BR" sz="1600" b="1">
                 <a:solidFill>
                   <a:srgbClr val="1F497D"/>
                 </a:solidFill>
@@ -5762,8 +5725,8 @@
         </p:nvSpPr>
         <p:spPr>
           <a:xfrm>
-            <a:off x="2118645" y="417104"/>
-            <a:ext cx="10073355" cy="1138773"/>
+            <a:off x="2108200" y="406400"/>
+            <a:ext cx="7620000" cy="762000"/>
           </a:xfrm>
           <a:prstGeom prst="rect">
             <a:avLst/>
@@ -5776,14 +5739,16 @@
           </a:bodyPr>
           <a:lstStyle/>
           <a:p>
-            <a:pPr/>
-            <a:r>
-              <a:rPr lang="pt-BR" sz="2200" b="1">
+            <a:pPr>
+              <a:buNone/>
+            </a:pPr>
+            <a:r>
+              <a:rPr lang="pt-BR" sz="2400" b="1">
                 <a:solidFill>
                   <a:srgbClr val="A33D6B"/>
                 </a:solidFill>
               </a:rPr>
-              <a:t>MATERIAL EDUCATIVO DIGITAL — MÓDULOS E FUNCIONALIDADES</a:t>
+              <a:t>MATERIAL EDUCATIVO DIGITAL</a:t>
             </a:r>
           </a:p>
         </p:txBody>
@@ -5878,66 +5843,6 @@
           </a:extLst>
         </p:spPr>
       </p:pic>
-      <p:pic>
-        <p:nvPicPr>
-          <p:cNvPr id="21" name="Imagem 20">
-            <a:extLst>
-              <a:ext uri="{FF2B5EF4-FFF2-40B4-BE49-F238E27FC236}">
-                <ns3:creationId id="{166F6E08-F586-F617-92F1-6823A6342D25}"/>
-              </a:ext>
-            </a:extLst>
-          </p:cNvPr>
-          <p:cNvPicPr>
-            <a:picLocks noChangeAspect="1"/>
-          </p:cNvPicPr>
-          <p:nvPr/>
-        </p:nvPicPr>
-        <p:blipFill>
-          <a:blip r:embed="rId4"/>
-          <a:stretch>
-            <a:fillRect/>
-          </a:stretch>
-        </p:blipFill>
-        <p:spPr>
-          <a:xfrm>
-            <a:off x="1505142" y="2323070"/>
-            <a:ext cx="5540610" cy="2680940"/>
-          </a:xfrm>
-          <a:prstGeom prst="rect">
-            <a:avLst/>
-          </a:prstGeom>
-        </p:spPr>
-      </p:pic>
-      <p:pic>
-        <p:nvPicPr>
-          <p:cNvPr id="23" name="Imagem 22">
-            <a:extLst>
-              <a:ext uri="{FF2B5EF4-FFF2-40B4-BE49-F238E27FC236}">
-                <ns3:creationId id="{9030A7EC-30E5-14A0-E35F-7C1AFD130667}"/>
-              </a:ext>
-            </a:extLst>
-          </p:cNvPr>
-          <p:cNvPicPr>
-            <a:picLocks noChangeAspect="1"/>
-          </p:cNvPicPr>
-          <p:nvPr/>
-        </p:nvPicPr>
-        <p:blipFill>
-          <a:blip r:embed="rId5"/>
-          <a:stretch>
-            <a:fillRect/>
-          </a:stretch>
-        </p:blipFill>
-        <p:spPr>
-          <a:xfrm>
-            <a:off x="2944519" y="3522914"/>
-            <a:ext cx="5990448" cy="2873172"/>
-          </a:xfrm>
-          <a:prstGeom prst="rect">
-            <a:avLst/>
-          </a:prstGeom>
-        </p:spPr>
-      </p:pic>
       <p:sp>
         <p:nvSpPr>
           <p:cNvPr id="2" name="CaixaDeTexto 1">
@@ -5952,8 +5857,8 @@
         </p:nvSpPr>
         <p:spPr>
           <a:xfrm>
-            <a:off x="1399634" y="1317827"/>
-            <a:ext cx="9608677" cy="779444"/>
+            <a:off x="1066800" y="1244600"/>
+            <a:ext cx="10160000" cy="508000"/>
           </a:xfrm>
           <a:prstGeom prst="rect">
             <a:avLst/>
@@ -5966,14 +5871,16 @@
           </a:bodyPr>
           <a:lstStyle/>
           <a:p>
-            <a:pPr/>
-            <a:r>
-              <a:rPr lang="pt-BR" sz="1500" b="1">
+            <a:pPr>
+              <a:buNone/>
+            </a:pPr>
+            <a:r>
+              <a:rPr lang="pt-BR" sz="1800" b="1">
                 <a:solidFill>
                   <a:schemeClr val="accent1"/>
                 </a:solidFill>
               </a:rPr>
-              <a:t>Detalhamento dos Componentes Operacionais Integrados no Hub Figma</a:t>
+              <a:t>Telas e módulos operacionais previstos no protótipo</a:t>
             </a:r>
           </a:p>
         </p:txBody>
@@ -5992,8 +5899,8 @@
         </p:nvSpPr>
         <p:spPr>
           <a:xfrm>
-            <a:off x="7659522" y="2323070"/>
-            <a:ext cx="4078209" cy="830997"/>
+            <a:off x="1066800" y="1778000"/>
+            <a:ext cx="10160000" cy="4318000"/>
           </a:xfrm>
           <a:prstGeom prst="rect">
             <a:avLst/>
@@ -6006,103 +5913,103 @@
           </a:bodyPr>
           <a:lstStyle/>
           <a:p>
-            <a:pPr>
+            <a:pPr marL="285750" indent="-285750">
+              <a:spcBef>
+                <a:spcPts val="0"/>
+              </a:spcBef>
               <a:buFontTx/>
               <a:buChar char="•"/>
-              <a:spcBfr>
-                <a:spcPts val="80"/>
-              </a:spcBfr>
-            </a:pPr>
-            <a:r>
-              <a:rPr lang="pt-BR" sz="1200" b="1">
-                <a:solidFill>
-                  <a:srgbClr val="1F497D"/>
-                </a:solidFill>
-              </a:rPr>
-              <a:t>1. Matriz Interativa de Riscos LGPD &amp; Sanitizador de Faturas: </a:t>
-            </a:r>
-            <a:r>
-              <a:rPr lang="pt-BR" sz="1100" b="0">
+            </a:pPr>
+            <a:r>
+              <a:rPr lang="pt-BR" sz="1600" b="1">
+                <a:solidFill>
+                  <a:srgbClr val="A33D6B"/>
+                </a:solidFill>
+              </a:rPr>
+              <a:t>Inbox unificado e chat: </a:t>
+            </a:r>
+            <a:r>
+              <a:rPr lang="pt-BR" sz="1600" b="0">
                 <a:solidFill>
                   <a:srgbClr val="262626"/>
                 </a:solidFill>
               </a:rPr>
-              <a:t>Guia interativo que mapeia visualmente os campos críticos das faturas de energia (dados pessoais, titularidade e código de instalação) e orienta a higienização em 3 passos antes de qualquer processamento por IA.</a:t>
-            </a:r>
-          </a:p>
-          <a:p>
-            <a:pPr>
+              <a:t>painel de 3 colunas (filtros, chat com identificação de mensagens do bot e do humano, controle da janela de 24 h da Meta) para intervenção imediata do atendente.</a:t>
+            </a:r>
+          </a:p>
+          <a:p>
+            <a:pPr marL="285750" indent="-285750">
+              <a:spcBef>
+                <a:spcPts val="700"/>
+              </a:spcBef>
               <a:buFontTx/>
               <a:buChar char="•"/>
-              <a:spcBfr>
-                <a:spcPts val="120"/>
-              </a:spcBfr>
-            </a:pPr>
-            <a:r>
-              <a:rPr lang="pt-BR" sz="1200" b="1">
-                <a:solidFill>
-                  <a:srgbClr val="1F497D"/>
-                </a:solidFill>
-              </a:rPr>
-              <a:t>2. Simulador de Prompts Seguros para o Setor Solar: </a:t>
-            </a:r>
-            <a:r>
-              <a:rPr lang="pt-BR" sz="1100" b="0">
+            </a:pPr>
+            <a:r>
+              <a:rPr lang="pt-BR" sz="1600" b="1">
+                <a:solidFill>
+                  <a:srgbClr val="A33D6B"/>
+                </a:solidFill>
+              </a:rPr>
+              <a:t>Ficha 360° do cliente: </a:t>
+            </a:r>
+            <a:r>
+              <a:rPr lang="pt-BR" sz="1600" b="0">
                 <a:solidFill>
                   <a:srgbClr val="262626"/>
                 </a:solidFill>
               </a:rPr>
-              <a:t>Interface com parâmetros pré-configurados que incorpora as travas regulatórias da Lei 14.300/2022 e regras da ANEEL, prevenindo alucinações tarifárias em relatórios e atendimentos.</a:t>
-            </a:r>
-          </a:p>
-          <a:p>
-            <a:pPr>
+              <a:t>dados do banco sincronizados — unidades consumidoras, saldo de créditos CEMIG em kWh, faturas abertas na Digital Grid e histórico de contestações.</a:t>
+            </a:r>
+          </a:p>
+          <a:p>
+            <a:pPr marL="285750" indent="-285750">
+              <a:spcBef>
+                <a:spcPts val="700"/>
+              </a:spcBef>
               <a:buFontTx/>
               <a:buChar char="•"/>
-              <a:spcBfr>
-                <a:spcPts val="120"/>
-              </a:spcBfr>
-            </a:pPr>
-            <a:r>
-              <a:rPr lang="pt-BR" sz="1200" b="1">
-                <a:solidFill>
-                  <a:srgbClr val="1F497D"/>
-                </a:solidFill>
-              </a:rPr>
-              <a:t>3. Protocolo de Validação Humana (Human-in-the-Loop): </a:t>
-            </a:r>
-            <a:r>
-              <a:rPr lang="pt-BR" sz="1100" b="0">
+            </a:pPr>
+            <a:r>
+              <a:rPr lang="pt-BR" sz="1600" b="1">
+                <a:solidFill>
+                  <a:srgbClr val="A33D6B"/>
+                </a:solidFill>
+              </a:rPr>
+              <a:t>Painel ao vivo e autorizações: </a:t>
+            </a:r>
+            <a:r>
+              <a:rPr lang="pt-BR" sz="1600" b="0">
                 <a:solidFill>
                   <a:srgbClr val="262626"/>
                 </a:solidFill>
               </a:rPr>
-              <a:t>Fluxograma interativo de conferência cruzada obrigatória para analistas de faturamento, impedindo a emissão de cálculos sem dupla validação.</a:t>
-            </a:r>
-          </a:p>
-          <a:p>
-            <a:pPr>
+              <a:t>filas por setor, situação dos atendentes e aprovação de acordos que excedam a alçada autônoma do agente.</a:t>
+            </a:r>
+          </a:p>
+          <a:p>
+            <a:pPr marL="285750" indent="-285750">
+              <a:spcBef>
+                <a:spcPts val="700"/>
+              </a:spcBef>
               <a:buFontTx/>
               <a:buChar char="•"/>
-              <a:spcBfr>
-                <a:spcPts val="120"/>
-              </a:spcBfr>
-            </a:pPr>
-            <a:r>
-              <a:rPr lang="pt-BR" sz="1200" b="1">
-                <a:solidFill>
-                  <a:srgbClr val="1F497D"/>
-                </a:solidFill>
-              </a:rPr>
-              <a:t>4. Guia de Bolso Corporativo (Cheat Sheet): </a:t>
-            </a:r>
-            <a:r>
-              <a:rPr lang="pt-BR" sz="1100" b="0">
+            </a:pPr>
+            <a:r>
+              <a:rPr lang="pt-BR" sz="1600" b="1">
+                <a:solidFill>
+                  <a:srgbClr val="A33D6B"/>
+                </a:solidFill>
+              </a:rPr>
+              <a:t>Régua de cobrança e disparos: </a:t>
+            </a:r>
+            <a:r>
+              <a:rPr lang="pt-BR" sz="1600" b="0">
                 <a:solidFill>
                   <a:srgbClr val="262626"/>
                 </a:solidFill>
               </a:rPr>
-              <a:t>Cartilha resumida contendo os 10 Mandamentos do Uso Ético de IA na Performa Energy, disponível para consulta rápida na intranet.</a:t>
+              <a:t>parametrização da régua (D-3, D0, D+5, D+10) e segmentação de destinatários com templates aprovados pela Meta.</a:t>
             </a:r>
           </a:p>
         </p:txBody>
@@ -6165,8 +6072,8 @@
         </p:nvSpPr>
         <p:spPr>
           <a:xfrm>
-            <a:off x="2118645" y="417104"/>
-            <a:ext cx="10073355" cy="1138773"/>
+            <a:off x="2108200" y="406400"/>
+            <a:ext cx="7620000" cy="762000"/>
           </a:xfrm>
           <a:prstGeom prst="rect">
             <a:avLst/>
@@ -6179,14 +6086,16 @@
           </a:bodyPr>
           <a:lstStyle/>
           <a:p>
-            <a:pPr/>
-            <a:r>
-              <a:rPr lang="pt-BR" sz="2200" b="1">
+            <a:pPr>
+              <a:buNone/>
+            </a:pPr>
+            <a:r>
+              <a:rPr lang="pt-BR" sz="2400" b="1">
                 <a:solidFill>
                   <a:srgbClr val="A33D6B"/>
                 </a:solidFill>
               </a:rPr>
-              <a:t>REGISTROS DO DESENVOLVIMENTO DA ATIVIDADE PRESENCIAL</a:t>
+              <a:t>REGISTROS DO DESENVOLVIMENTO DA ATIVIDADE</a:t>
             </a:r>
           </a:p>
         </p:txBody>
@@ -6295,8 +6204,8 @@
         </p:nvSpPr>
         <p:spPr>
           <a:xfrm>
-            <a:off x="1291661" y="1214733"/>
-            <a:ext cx="9608677" cy="1133387"/>
+            <a:off x="1066800" y="1244600"/>
+            <a:ext cx="10160000" cy="4826000"/>
           </a:xfrm>
           <a:prstGeom prst="rect">
             <a:avLst/>
@@ -6309,213 +6218,111 @@
           </a:bodyPr>
           <a:lstStyle/>
           <a:p>
-            <a:pPr/>
-            <a:r>
-              <a:rPr lang="pt-BR" sz="1400" b="1">
+            <a:pPr>
+              <a:buNone/>
+            </a:pPr>
+            <a:r>
+              <a:rPr lang="pt-BR" sz="1800" b="1">
                 <a:solidFill>
                   <a:schemeClr val="accent1"/>
                 </a:solidFill>
               </a:rPr>
-              <a:t>Painel Fotográfico Comprobatório da Apresentação Presencial (Avaliação de 50 Pontos — Módulo 4)</a:t>
+              <a:t>Registros fotográficos previstos para a apresentação presencial</a:t>
+            </a:r>
+          </a:p>
+          <a:p>
+            <a:pPr marL="285750" indent="-285750">
+              <a:spcBef>
+                <a:spcPts val="900"/>
+              </a:spcBef>
+              <a:buFontTx/>
+              <a:buChar char="•"/>
+            </a:pPr>
+            <a:r>
+              <a:rPr lang="pt-BR" sz="1600" b="1">
+                <a:solidFill>
+                  <a:srgbClr val="A33D6B"/>
+                </a:solidFill>
+              </a:rPr>
+              <a:t>Foto 1 — Abertura e arquitetura do banco: </a:t>
+            </a:r>
+            <a:r>
+              <a:rPr lang="pt-BR" sz="1600" b="0">
+                <a:solidFill>
+                  <a:srgbClr val="262626"/>
+                </a:solidFill>
+              </a:rPr>
+              <a:t>discente apresentando a modelagem das tabelas wa_*, o fluxo do agente e a integração com os relatórios da CEMIG, com as equipes reunidas.</a:t>
+            </a:r>
+          </a:p>
+          <a:p>
+            <a:pPr marL="285750" indent="-285750">
+              <a:spcBef>
+                <a:spcPts val="700"/>
+              </a:spcBef>
+              <a:buFontTx/>
+              <a:buChar char="•"/>
+            </a:pPr>
+            <a:r>
+              <a:rPr lang="pt-BR" sz="1600" b="1">
+                <a:solidFill>
+                  <a:srgbClr val="A33D6B"/>
+                </a:solidFill>
+              </a:rPr>
+              <a:t>Foto 2 — Oficina prática no protótipo: </a:t>
+            </a:r>
+            <a:r>
+              <a:rPr lang="pt-BR" sz="1600" b="0">
+                <a:solidFill>
+                  <a:srgbClr val="262626"/>
+                </a:solidFill>
+              </a:rPr>
+              <a:t>analistas, em suas estações de trabalho, navegando no protótipo Figma e simulando atendimento, consulta de créditos em kWh e negociação.</a:t>
+            </a:r>
+          </a:p>
+          <a:p>
+            <a:pPr marL="285750" indent="-285750">
+              <a:spcBef>
+                <a:spcPts val="700"/>
+              </a:spcBef>
+              <a:buFontTx/>
+              <a:buChar char="•"/>
+            </a:pPr>
+            <a:r>
+              <a:rPr lang="pt-BR" sz="1600" b="1">
+                <a:solidFill>
+                  <a:srgbClr val="A33D6B"/>
+                </a:solidFill>
+              </a:rPr>
+              <a:t>Foto 3 — Debate sobre transbordo e avaliação: </a:t>
+            </a:r>
+            <a:r>
+              <a:rPr lang="pt-BR" sz="1600" b="0">
+                <a:solidFill>
+                  <a:srgbClr val="262626"/>
+                </a:solidFill>
+              </a:rPr>
+              <a:t>discussão sobre governança de dados e alçadas de desconto, seguida do preenchimento da ficha de avaliação.</a:t>
             </a:r>
           </a:p>
           <a:p>
             <a:pPr>
-              <a:buFontTx/>
-              <a:buChar char="[1]"/>
-              <a:spcBfr>
-                <a:spcPts val="100"/>
-              </a:spcBfr>
-            </a:pPr>
-            <a:r>
-              <a:rPr lang="pt-BR" sz="1200" b="1">
-                <a:solidFill>
-                  <a:srgbClr val="1F497D"/>
-                </a:solidFill>
-              </a:rPr>
-              <a:t>FOTO 1 — Abertura e Sensibilização Teórica na Sala de Reuniões: </a:t>
-            </a:r>
-            <a:r>
-              <a:rPr lang="pt-BR" sz="1100" b="0">
-                <a:solidFill>
-                  <a:srgbClr val="262626"/>
-                </a:solidFill>
-              </a:rPr>
-              <a:t>O discente extensionista em pé junto à Smart TV corporativa apresentando os slides da oficina sobre IA ética, ODS 7, 9 e 13 e governança da LGPD, com a equipe multidisciplinar da Performa Energy reunida e atenta.</a:t>
-            </a:r>
-          </a:p>
-          <a:p>
-            <a:pPr>
-              <a:buFontTx/>
-              <a:buChar char="[2]"/>
-              <a:spcBfr>
-                <a:spcPts val="120"/>
-              </a:spcBfr>
-            </a:pPr>
-            <a:r>
-              <a:rPr lang="pt-BR" sz="1200" b="1">
-                <a:solidFill>
-                  <a:srgbClr val="1F497D"/>
-                </a:solidFill>
-              </a:rPr>
-              <a:t>FOTO 2 — Oficina Prática Hands-On e Navegação no Figma: </a:t>
-            </a:r>
-            <a:r>
-              <a:rPr lang="pt-BR" sz="1100" b="0">
-                <a:solidFill>
-                  <a:srgbClr val="262626"/>
-                </a:solidFill>
-              </a:rPr>
-              <a:t>Registro lateral dos colaboradores utilizando seus laptops corporativos, navegando no protótipo «Solar AI Ethics &amp; Hub Performa» e praticando a higienização de faturas reais com a mediação do aluno.</a:t>
-            </a:r>
-          </a:p>
-          <a:p>
-            <a:pPr>
-              <a:buFontTx/>
-              <a:buChar char="[3]"/>
-              <a:spcBfr>
-                <a:spcPts val="120"/>
-              </a:spcBfr>
-            </a:pPr>
-            <a:r>
-              <a:rPr lang="pt-BR" sz="1200" b="1">
-                <a:solidFill>
-                  <a:srgbClr val="1F497D"/>
-                </a:solidFill>
-              </a:rPr>
-              <a:t>FOTO 3 — Debate Conclusivo, Coleta da Avaliação e Encerramento: </a:t>
-            </a:r>
-            <a:r>
-              <a:rPr lang="pt-BR" sz="1100" b="0">
-                <a:solidFill>
-                  <a:srgbClr val="262626"/>
-                </a:solidFill>
-              </a:rPr>
-              <a:t>Visão da equipe reunida participando do debate sobre responsabilidade algorítmica, preenchimento do formulário de avaliação (escala Likert) e validação dos resultados da extensão universitária.</a:t>
-            </a:r>
-          </a:p>
-          <a:p>
-            <a:pPr>
-              <a:spcBfr>
-                <a:spcPts val="150"/>
-              </a:spcBfr>
-            </a:pPr>
-            <a:r>
-              <a:rPr lang="pt-BR" sz="1050" b="0" i="1">
+              <a:spcBef>
+                <a:spcPts val="900"/>
+              </a:spcBef>
+              <a:buNone/>
+            </a:pPr>
+            <a:r>
+              <a:rPr lang="pt-BR" sz="1600" b="0" i="1">
                 <a:solidFill>
                   <a:srgbClr val="595959"/>
                 </a:solidFill>
               </a:rPr>
-              <a:t>Nota: Os três registros fotográficos presenciais atendem estritamente às exigências do Módulo 4 (pontuação integral de 50 pontos).</a:t>
-            </a:r>
-          </a:p>
-        </p:txBody>
-      </p:sp>
-      <p:pic>
-        <p:nvPicPr>
-          <p:cNvPr id="2" name="Imagem 1" descr="Pessoas assistindo televisão&#10;&#10;Descrição gerada automaticamente">
-            <a:extLst>
-              <a:ext uri="{FF2B5EF4-FFF2-40B4-BE49-F238E27FC236}">
-                <ns3:creationId id="{6239F134-480F-CF78-6E1D-A5231629D7FD}"/>
-              </a:ext>
-            </a:extLst>
-          </p:cNvPr>
-          <p:cNvPicPr>
-            <a:picLocks noChangeAspect="1"/>
-          </p:cNvPicPr>
-          <p:nvPr/>
-        </p:nvPicPr>
-        <p:blipFill rotWithShape="1">
-          <a:blip r:embed="rId4">
-            <a:extLst>
-              <a:ext uri="{28A0092B-C50C-407E-A947-70E740481C1C}">
-                <ns4:useLocalDpi val="0"/>
-              </a:ext>
-            </a:extLst>
-          </a:blip>
-          <a:srcRect r="-1" b="6161"/>
-          <a:stretch/>
-        </p:blipFill>
-        <p:spPr>
-          <a:xfrm>
-            <a:off x="4245934" y="3879065"/>
-            <a:ext cx="4425623" cy="1868815"/>
-          </a:xfrm>
-          <a:prstGeom prst="rect">
-            <a:avLst/>
-          </a:prstGeom>
-        </p:spPr>
-      </p:pic>
-      <p:pic>
-        <p:nvPicPr>
-          <p:cNvPr id="5" name="Imagem 4" descr="Uma imagem contendo no interior, em pé, quarto, vivendo&#10;&#10;Descrição gerada automaticamente">
-            <a:extLst>
-              <a:ext uri="{FF2B5EF4-FFF2-40B4-BE49-F238E27FC236}">
-                <ns3:creationId id="{312F29A8-7BFA-A9AC-1197-B2F031E11E70}"/>
-              </a:ext>
-            </a:extLst>
-          </p:cNvPr>
-          <p:cNvPicPr>
-            <a:picLocks noChangeAspect="1"/>
-          </p:cNvPicPr>
-          <p:nvPr/>
-        </p:nvPicPr>
-        <p:blipFill rotWithShape="1">
-          <a:blip r:embed="rId5">
-            <a:extLst>
-              <a:ext uri="{28A0092B-C50C-407E-A947-70E740481C1C}">
-                <ns4:useLocalDpi val="0"/>
-              </a:ext>
-            </a:extLst>
-          </a:blip>
-          <a:srcRect t="19686" r="-2" b="14719"/>
-          <a:stretch/>
-        </p:blipFill>
-        <p:spPr>
-          <a:xfrm>
-            <a:off x="1849474" y="2858026"/>
-            <a:ext cx="2133050" cy="1865533"/>
-          </a:xfrm>
-          <a:prstGeom prst="rect">
-            <a:avLst/>
-          </a:prstGeom>
-        </p:spPr>
-      </p:pic>
-      <p:pic>
-        <p:nvPicPr>
-          <p:cNvPr id="8" name="Imagem 7" descr="Pessoas assistindo televisão&#10;&#10;Descrição gerada automaticamente com confiança média">
-            <a:extLst>
-              <a:ext uri="{FF2B5EF4-FFF2-40B4-BE49-F238E27FC236}">
-                <ns3:creationId id="{1CE79CF3-5DE8-EA10-6E5E-615244129301}"/>
-              </a:ext>
-            </a:extLst>
-          </p:cNvPr>
-          <p:cNvPicPr>
-            <a:picLocks noChangeAspect="1"/>
-          </p:cNvPicPr>
-          <p:nvPr/>
-        </p:nvPicPr>
-        <p:blipFill rotWithShape="1">
-          <a:blip r:embed="rId6">
-            <a:extLst>
-              <a:ext uri="{28A0092B-C50C-407E-A947-70E740481C1C}">
-                <ns4:useLocalDpi val="0"/>
-              </a:ext>
-            </a:extLst>
-          </a:blip>
-          <a:srcRect l="7351" r="41114" b="-1"/>
-          <a:stretch/>
-        </p:blipFill>
-        <p:spPr>
-          <a:xfrm>
-            <a:off x="8934967" y="2858026"/>
-            <a:ext cx="2136433" cy="1865533"/>
-          </a:xfrm>
-          <a:prstGeom prst="rect">
-            <a:avLst/>
-          </a:prstGeom>
-        </p:spPr>
-      </p:pic>
+              <a:t>As fotos reais, com consentimento dos participantes, serão inseridas no Módulo 4, após a realização da oficina.</a:t>
+            </a:r>
+          </a:p>
+        </p:txBody>
+      </p:sp>
     </p:spTree>
     <p:extLst>
       <p:ext uri="{BB962C8B-B14F-4D97-AF65-F5344CB8AC3E}">
@@ -6574,8 +6381,8 @@
         </p:nvSpPr>
         <p:spPr>
           <a:xfrm>
-            <a:off x="2000132" y="414551"/>
-            <a:ext cx="8191735" cy="2246769"/>
+            <a:off x="1993900" y="406400"/>
+            <a:ext cx="8191500" cy="571500"/>
           </a:xfrm>
           <a:prstGeom prst="rect">
             <a:avLst/>
@@ -6588,14 +6395,16 @@
           </a:bodyPr>
           <a:lstStyle/>
           <a:p>
-            <a:pPr/>
-            <a:r>
-              <a:rPr lang="pt-BR" sz="2200" b="1">
+            <a:pPr>
+              <a:buNone/>
+            </a:pPr>
+            <a:r>
+              <a:rPr lang="pt-BR" sz="2400" b="1">
                 <a:solidFill>
                   <a:srgbClr val="A33D6B"/>
                 </a:solidFill>
               </a:rPr>
-              <a:t>AUTOAVALIAÇÃO DO ESTUDANTE EXTENSIONISTA</a:t>
+              <a:t>AUTOAVALIAÇÃO</a:t>
             </a:r>
           </a:p>
         </p:txBody>
@@ -6704,8 +6513,8 @@
         </p:nvSpPr>
         <p:spPr>
           <a:xfrm>
-            <a:off x="2000132" y="2779650"/>
-            <a:ext cx="8621111" cy="2923877"/>
+            <a:off x="1270000" y="1714500"/>
+            <a:ext cx="9906000" cy="4445000"/>
           </a:xfrm>
           <a:prstGeom prst="rect">
             <a:avLst/>
@@ -6718,128 +6527,128 @@
           </a:bodyPr>
           <a:lstStyle/>
           <a:p>
-            <a:pPr>
+            <a:pPr marL="285750" indent="-285750">
+              <a:spcBef>
+                <a:spcPts val="0"/>
+              </a:spcBef>
               <a:buFontTx/>
               <a:buChar char="•"/>
-              <a:spcBfr>
-                <a:spcPts val="60"/>
-              </a:spcBfr>
-            </a:pPr>
-            <a:r>
-              <a:rPr lang="pt-BR" sz="1150" b="1">
-                <a:solidFill>
-                  <a:srgbClr val="1F497D"/>
-                </a:solidFill>
-              </a:rPr>
-              <a:t>1. Relevância da Temática (Global e Local): </a:t>
-            </a:r>
-            <a:r>
-              <a:rPr lang="pt-BR" sz="1050" b="0">
+            </a:pPr>
+            <a:r>
+              <a:rPr lang="pt-BR" sz="1600" b="1">
+                <a:solidFill>
+                  <a:srgbClr val="A33D6B"/>
+                </a:solidFill>
+              </a:rPr>
+              <a:t>Relevância da temática (global e local): </a:t>
+            </a:r>
+            <a:r>
+              <a:rPr lang="pt-BR" sz="1600" b="0">
                 <a:solidFill>
                   <a:srgbClr val="262626"/>
                 </a:solidFill>
               </a:rPr>
-              <a:t>Compreendi na prática que os dilemas globais de IA e ética só se materializam de forma construtiva quando traduzidos para a rotina diária de uma empresa de energia limpa no contexto local.</a:t>
-            </a:r>
-          </a:p>
-          <a:p>
-            <a:pPr>
+              <a:t>a união entre energia limpa (ODS 7) e inovação em banco de dados e IA (ODS 9) deve mostrar como soluções locais do setor solar contribuem para metas globais.</a:t>
+            </a:r>
+          </a:p>
+          <a:p>
+            <a:pPr marL="285750" indent="-285750">
+              <a:spcBef>
+                <a:spcPts val="500"/>
+              </a:spcBef>
               <a:buFontTx/>
               <a:buChar char="•"/>
-              <a:spcBfr>
-                <a:spcPts val="80"/>
-              </a:spcBfr>
-            </a:pPr>
-            <a:r>
-              <a:rPr lang="pt-BR" sz="1150" b="1">
-                <a:solidFill>
-                  <a:srgbClr val="1F497D"/>
-                </a:solidFill>
-              </a:rPr>
-              <a:t>2. Formação Acadêmica e Profissional: </a:t>
-            </a:r>
-            <a:r>
-              <a:rPr lang="pt-BR" sz="1050" b="0">
+            </a:pPr>
+            <a:r>
+              <a:rPr lang="pt-BR" sz="1600" b="1">
+                <a:solidFill>
+                  <a:srgbClr val="A33D6B"/>
+                </a:solidFill>
+              </a:rPr>
+              <a:t>Formação acadêmica em Banco de Dados: </a:t>
+            </a:r>
+            <a:r>
+              <a:rPr lang="pt-BR" sz="1600" b="0">
                 <a:solidFill>
                   <a:srgbClr val="262626"/>
                 </a:solidFill>
               </a:rPr>
-              <a:t>Articulação real entre disciplinas técnicas de TI (Arquitetura de Dados, Segurança da Informação e UI/UX) com marcos regulatórios como a LGPD e a Lei 14.300/2022, consolidando uma formação aplicada e cidadã.</a:t>
-            </a:r>
-          </a:p>
-          <a:p>
-            <a:pPr>
+              <a:t>prevê-se consolidar, na prática, modelagem relacional, integridade referencial, consultas, integração via APIs e governança sob a LGPD.</a:t>
+            </a:r>
+          </a:p>
+          <a:p>
+            <a:pPr marL="285750" indent="-285750">
+              <a:spcBef>
+                <a:spcPts val="500"/>
+              </a:spcBef>
               <a:buFontTx/>
               <a:buChar char="•"/>
-              <a:spcBfr>
-                <a:spcPts val="80"/>
-              </a:spcBfr>
-            </a:pPr>
-            <a:r>
-              <a:rPr lang="pt-BR" sz="1150" b="1">
-                <a:solidFill>
-                  <a:srgbClr val="1F497D"/>
-                </a:solidFill>
-              </a:rPr>
-              <a:t>3. Desenvolvimento de Soft Skills: </a:t>
-            </a:r>
-            <a:r>
-              <a:rPr lang="pt-BR" sz="1050" b="0">
+            </a:pPr>
+            <a:r>
+              <a:rPr lang="pt-BR" sz="1600" b="1">
+                <a:solidFill>
+                  <a:srgbClr val="A33D6B"/>
+                </a:solidFill>
+              </a:rPr>
+              <a:t>Soft skills: </a:t>
+            </a:r>
+            <a:r>
+              <a:rPr lang="pt-BR" sz="1600" b="0">
                 <a:solidFill>
                   <a:srgbClr val="262626"/>
                 </a:solidFill>
               </a:rPr>
-              <a:t>Desenvolvimento substancial de comunicação assertiva, inteligência emocional e liderança pedagógica para dialogar com profissionais experientes de diferentes setores corporativos.</a:t>
-            </a:r>
-          </a:p>
-          <a:p>
-            <a:pPr>
+              <a:t>espera-se evoluir em comunicação técnica e pedagógica, negociação e escuta das dificuldades operacionais dos usuários.</a:t>
+            </a:r>
+          </a:p>
+          <a:p>
+            <a:pPr marL="285750" indent="-285750">
+              <a:spcBef>
+                <a:spcPts val="500"/>
+              </a:spcBef>
               <a:buFontTx/>
               <a:buChar char="•"/>
-              <a:spcBfr>
-                <a:spcPts val="80"/>
-              </a:spcBfr>
-            </a:pPr>
-            <a:r>
-              <a:rPr lang="pt-BR" sz="1150" b="1">
-                <a:solidFill>
-                  <a:srgbClr val="1F497D"/>
-                </a:solidFill>
-              </a:rPr>
-              <a:t>4. Conexão e Interação com a Comunidade: </a:t>
-            </a:r>
-            <a:r>
-              <a:rPr lang="pt-BR" sz="1050" b="0">
+            </a:pPr>
+            <a:r>
+              <a:rPr lang="pt-BR" sz="1600" b="1">
+                <a:solidFill>
+                  <a:srgbClr val="A33D6B"/>
+                </a:solidFill>
+              </a:rPr>
+              <a:t>Conexão com a comunidade: </a:t>
+            </a:r>
+            <a:r>
+              <a:rPr lang="pt-BR" sz="1600" b="0">
                 <a:solidFill>
                   <a:srgbClr val="262626"/>
                 </a:solidFill>
               </a:rPr>
-              <a:t>Superação do isolamento estritamente técnico por meio da escuta ativa das dores operacionais dos colaboradores da Performa Energy, co-criando soluções práticas e viáveis.</a:t>
-            </a:r>
-          </a:p>
-          <a:p>
-            <a:pPr>
+              <a:t>a atividade busca aproximar a teoria das necessidades reais da equipe da Performa Energy, gerando valor compartilhado.</a:t>
+            </a:r>
+          </a:p>
+          <a:p>
+            <a:pPr marL="285750" indent="-285750">
+              <a:spcBef>
+                <a:spcPts val="500"/>
+              </a:spcBef>
               <a:buFontTx/>
               <a:buChar char="•"/>
-              <a:spcBfr>
-                <a:spcPts val="80"/>
-              </a:spcBfr>
-            </a:pPr>
-            <a:r>
-              <a:rPr lang="pt-BR" sz="1150" b="1">
-                <a:solidFill>
-                  <a:srgbClr val="1F497D"/>
-                </a:solidFill>
-              </a:rPr>
-              <a:t>5. Empoderamento e Transformação Social: </a:t>
-            </a:r>
-            <a:r>
-              <a:rPr lang="pt-BR" sz="1050" b="0">
+            </a:pPr>
+            <a:r>
+              <a:rPr lang="pt-BR" sz="1600" b="1">
+                <a:solidFill>
+                  <a:srgbClr val="A33D6B"/>
+                </a:solidFill>
+              </a:rPr>
+              <a:t>Empoderamento e transformação social: </a:t>
+            </a:r>
+            <a:r>
+              <a:rPr lang="pt-BR" sz="1600" b="0">
                 <a:solidFill>
                   <a:srgbClr val="262626"/>
                 </a:solidFill>
               </a:rPr>
-              <a:t>Reconhecimento do meu papel como agente de transformação social, apto a disseminar a tecnologia para a sustentabilidade e a justiça energética com responsabilidade ética.</a:t>
+              <a:t>busca-se ampliar a percepção do tecnólogo em Banco de Dados como arquiteto de soluções éticas que protegem a privacidade e a cidadania.</a:t>
             </a:r>
           </a:p>
         </p:txBody>
@@ -6858,8 +6667,8 @@
         </p:nvSpPr>
         <p:spPr>
           <a:xfrm>
-            <a:off x="2000132" y="2524406"/>
-            <a:ext cx="6097464" cy="392159"/>
+            <a:off x="1270000" y="1168400"/>
+            <a:ext cx="9906000" cy="457200"/>
           </a:xfrm>
           <a:prstGeom prst="rect">
             <a:avLst/>
@@ -6872,14 +6681,16 @@
           </a:bodyPr>
           <a:lstStyle/>
           <a:p>
-            <a:pPr/>
-            <a:r>
-              <a:rPr lang="pt-BR" sz="1500" b="1">
+            <a:pPr>
+              <a:buNone/>
+            </a:pPr>
+            <a:r>
+              <a:rPr lang="pt-BR" sz="1800" b="1">
                 <a:solidFill>
                   <a:schemeClr val="accent1"/>
                 </a:solidFill>
               </a:rPr>
-              <a:t>Reflexão Crítica Estruturada nas Cinco Dimensões Formativas Oficiais da Faculdade Unyleya</a:t>
+              <a:t>Reflexão sobre as cinco dimensões formativas da Unyleya</a:t>
             </a:r>
           </a:p>
         </p:txBody>
@@ -6942,8 +6753,8 @@
         </p:nvSpPr>
         <p:spPr>
           <a:xfrm>
-            <a:off x="2000132" y="414551"/>
-            <a:ext cx="8911122" cy="2862322"/>
+            <a:off x="1993900" y="406400"/>
+            <a:ext cx="8902700" cy="571500"/>
           </a:xfrm>
           <a:prstGeom prst="rect">
             <a:avLst/>
@@ -6956,9 +6767,11 @@
           </a:bodyPr>
           <a:lstStyle/>
           <a:p>
-            <a:pPr/>
-            <a:r>
-              <a:rPr lang="pt-BR" sz="2200" b="1">
+            <a:pPr>
+              <a:buNone/>
+            </a:pPr>
+            <a:r>
+              <a:rPr lang="pt-BR" sz="2400" b="1">
                 <a:solidFill>
                   <a:srgbClr val="A33D6B"/>
                 </a:solidFill>
@@ -7072,8 +6885,8 @@
         </p:nvSpPr>
         <p:spPr>
           <a:xfrm>
-            <a:off x="1819674" y="3757786"/>
-            <a:ext cx="8819017" cy="2185214"/>
+            <a:off x="1270000" y="1714500"/>
+            <a:ext cx="9906000" cy="4445000"/>
           </a:xfrm>
           <a:prstGeom prst="rect">
             <a:avLst/>
@@ -7086,119 +6899,144 @@
           </a:bodyPr>
           <a:lstStyle/>
           <a:p>
-            <a:pPr/>
-            <a:r>
-              <a:rPr lang="pt-BR" sz="1150" b="1">
-                <a:solidFill>
-                  <a:srgbClr val="1F497D"/>
-                </a:solidFill>
-              </a:rPr>
-              <a:t>MÉTRICAS QUANTITATIVAS APURADAS (Escala Likert de 1 a 5 — N=14 colaboradores):</a:t>
-            </a:r>
-          </a:p>
-          <a:p>
-            <a:pPr>
-              <a:spcBfr>
-                <a:spcPts val="60"/>
-              </a:spcBfr>
-            </a:pPr>
-            <a:r>
-              <a:rPr lang="pt-BR" sz="1100" b="1">
-                <a:solidFill>
-                  <a:srgbClr val="0070C0"/>
-                </a:solidFill>
-              </a:rPr>
-              <a:t>• Relevância Temática: 4.9/5.0  |  • Usabilidade do Hub Figma: 4.8/5.0  |  • Segurança e LGPD: 4.9/5.0  |  • Didática do Aluno: 5.0/5.0  |  • Impacto Operacional: 4.9/5.0</a:t>
-            </a:r>
-          </a:p>
-          <a:p>
-            <a:pPr>
-              <a:spcBfr>
-                <a:spcPts val="120"/>
-              </a:spcBfr>
-            </a:pPr>
-            <a:r>
-              <a:rPr lang="pt-BR" sz="1150" b="1">
-                <a:solidFill>
-                  <a:srgbClr val="1F497D"/>
-                </a:solidFill>
-              </a:rPr>
-              <a:t>DEPOIMENTOS QUALITATIVOS ESTRUTURADOS (Anonimizados por Função):</a:t>
-            </a:r>
-          </a:p>
-          <a:p>
-            <a:pPr>
+            <a:pPr marL="285750" indent="-285750">
+              <a:spcBef>
+                <a:spcPts val="0"/>
+              </a:spcBef>
               <a:buFontTx/>
               <a:buChar char="•"/>
-              <a:spcBfr>
-                <a:spcPts val="60"/>
-              </a:spcBfr>
-            </a:pPr>
-            <a:r>
-              <a:rPr lang="pt-BR" sz="1100" b="1">
+            </a:pPr>
+            <a:r>
+              <a:rPr lang="pt-BR" sz="1600" b="1">
+                <a:solidFill>
+                  <a:srgbClr val="A33D6B"/>
+                </a:solidFill>
+              </a:rPr>
+              <a:t>Instrumento: </a:t>
+            </a:r>
+            <a:r>
+              <a:rPr lang="pt-BR" sz="1600" b="0">
                 <a:solidFill>
                   <a:srgbClr val="262626"/>
                 </a:solidFill>
               </a:rPr>
-              <a:t>Analista de Faturamento: </a:t>
-            </a:r>
-            <a:r>
-              <a:rPr lang="pt-BR" sz="1050" b="0" i="1">
-                <a:solidFill>
-                  <a:srgbClr val="404040"/>
-                </a:solidFill>
-              </a:rPr>
-              <a:t>«Recebemos dezenas de faturas diárias e usávamos ferramentas de IA com receio de expor dados de clientes ou errar cálculos. A oficina e o Hub interativo no Figma nos deram um procedimento padrão seguro para acelerar a conferência sem riscos jurídicos para a Performa Energy.»</a:t>
-            </a:r>
-          </a:p>
-          <a:p>
-            <a:pPr>
+              <a:t>questionário anônimo em escala Likert de 1 a 5, aplicado aos colaboradores participantes da oficina.</a:t>
+            </a:r>
+          </a:p>
+          <a:p>
+            <a:pPr marL="285750" indent="-285750">
+              <a:spcBef>
+                <a:spcPts val="500"/>
+              </a:spcBef>
               <a:buFontTx/>
               <a:buChar char="•"/>
-              <a:spcBfr>
-                <a:spcPts val="80"/>
-              </a:spcBfr>
-            </a:pPr>
-            <a:r>
-              <a:rPr lang="pt-BR" sz="1100" b="1">
+            </a:pPr>
+            <a:r>
+              <a:rPr lang="pt-BR" sz="1600" b="1">
+                <a:solidFill>
+                  <a:srgbClr val="A33D6B"/>
+                </a:solidFill>
+              </a:rPr>
+              <a:t>Metas: </a:t>
+            </a:r>
+            <a:r>
+              <a:rPr lang="pt-BR" sz="1600" b="0">
                 <a:solidFill>
                   <a:srgbClr val="262626"/>
                 </a:solidFill>
               </a:rPr>
-              <a:t>Consultor Comercial: </a:t>
-            </a:r>
-            <a:r>
-              <a:rPr lang="pt-BR" sz="1050" b="0" i="1">
-                <a:solidFill>
-                  <a:srgbClr val="404040"/>
-                </a:solidFill>
-              </a:rPr>
-              <a:t>«Compreender que a IA alucina regras regulatórias da ANEEL nos alertou para nunca enviar propostas aos clientes sem a dupla checagem humana. O checklist de prompts seguros virou nosso padrão diário.»</a:t>
-            </a:r>
-          </a:p>
-          <a:p>
-            <a:pPr>
+              <a:t>média ≥ 4,8 em aderência operacional, usabilidade do Figma, clareza didática e eficiência; 5,0 em segurança e LGPD.</a:t>
+            </a:r>
+          </a:p>
+          <a:p>
+            <a:pPr marL="285750" indent="-285750">
+              <a:spcBef>
+                <a:spcPts val="500"/>
+              </a:spcBef>
               <a:buFontTx/>
               <a:buChar char="•"/>
-              <a:spcBfr>
-                <a:spcPts val="80"/>
-              </a:spcBfr>
-            </a:pPr>
-            <a:r>
-              <a:rPr lang="pt-BR" sz="1100" b="1">
+            </a:pPr>
+            <a:r>
+              <a:rPr lang="pt-BR" sz="1600" b="1">
+                <a:solidFill>
+                  <a:srgbClr val="A33D6B"/>
+                </a:solidFill>
+              </a:rPr>
+              <a:t>Foco — Cobrança: </a:t>
+            </a:r>
+            <a:r>
+              <a:rPr lang="pt-BR" sz="1600" b="0">
                 <a:solidFill>
                   <a:srgbClr val="262626"/>
                 </a:solidFill>
               </a:rPr>
-              <a:t>Coordenador de Sustentabilidade: </a:t>
-            </a:r>
-            <a:r>
-              <a:rPr lang="pt-BR" sz="1050" b="0" i="1">
-                <a:solidFill>
-                  <a:srgbClr val="404040"/>
-                </a:solidFill>
-              </a:rPr>
-              <a:t>«A vinculação direta entre o propósito de energia limpa (ODS 7 e 13) e o uso ético da tecnologia (ODS 9) elevou o nível de maturidade da equipe. O discente demonstrou domínio acadêmico e liderança exemplar.»</a:t>
+              <a:t>redução do esforço manual em planilhas e eficácia da régua de negociação.</a:t>
+            </a:r>
+          </a:p>
+          <a:p>
+            <a:pPr marL="285750" indent="-285750">
+              <a:spcBef>
+                <a:spcPts val="500"/>
+              </a:spcBef>
+              <a:buFontTx/>
+              <a:buChar char="•"/>
+            </a:pPr>
+            <a:r>
+              <a:rPr lang="pt-BR" sz="1600" b="1">
+                <a:solidFill>
+                  <a:srgbClr val="A33D6B"/>
+                </a:solidFill>
+              </a:rPr>
+              <a:t>Foco — Sucesso do Cliente: </a:t>
+            </a:r>
+            <a:r>
+              <a:rPr lang="pt-BR" sz="1600" b="0">
+                <a:solidFill>
+                  <a:srgbClr val="262626"/>
+                </a:solidFill>
+              </a:rPr>
+              <a:t>clareza na explicação do rateio CEMIG em kWh e das faturas, na Ficha 360°.</a:t>
+            </a:r>
+          </a:p>
+          <a:p>
+            <a:pPr marL="285750" indent="-285750">
+              <a:spcBef>
+                <a:spcPts val="500"/>
+              </a:spcBef>
+              <a:buFontTx/>
+              <a:buChar char="•"/>
+            </a:pPr>
+            <a:r>
+              <a:rPr lang="pt-BR" sz="1600" b="1">
+                <a:solidFill>
+                  <a:srgbClr val="A33D6B"/>
+                </a:solidFill>
+              </a:rPr>
+              <a:t>Foco — TI e Operações: </a:t>
+            </a:r>
+            <a:r>
+              <a:rPr lang="pt-BR" sz="1600" b="0">
+                <a:solidFill>
+                  <a:srgbClr val="262626"/>
+                </a:solidFill>
+              </a:rPr>
+              <a:t>integridade das tabelas wa_*, segurança dos webhooks da Meta e não alucinação de valores pela IA.</a:t>
+            </a:r>
+          </a:p>
+          <a:p>
+            <a:pPr>
+              <a:spcBef>
+                <a:spcPts val="700"/>
+              </a:spcBef>
+              <a:buNone/>
+            </a:pPr>
+            <a:r>
+              <a:rPr lang="pt-BR" sz="1600" b="0" i="1">
+                <a:solidFill>
+                  <a:srgbClr val="595959"/>
+                </a:solidFill>
+              </a:rPr>
+              <a:t>Métricas e depoimentos reais serão tabulados no Módulo 4, após a oficina presencial (Semana 5).</a:t>
             </a:r>
           </a:p>
         </p:txBody>
@@ -7217,8 +7055,8 @@
         </p:nvSpPr>
         <p:spPr>
           <a:xfrm>
-            <a:off x="1819674" y="3422444"/>
-            <a:ext cx="6097464" cy="392159"/>
+            <a:off x="1270000" y="1168400"/>
+            <a:ext cx="9906000" cy="457200"/>
           </a:xfrm>
           <a:prstGeom prst="rect">
             <a:avLst/>
@@ -7231,14 +7069,16 @@
           </a:bodyPr>
           <a:lstStyle/>
           <a:p>
-            <a:pPr/>
-            <a:r>
-              <a:rPr lang="pt-BR" sz="1400" b="1">
+            <a:pPr>
+              <a:buNone/>
+            </a:pPr>
+            <a:r>
+              <a:rPr lang="pt-BR" sz="1800" b="1">
                 <a:solidFill>
                   <a:schemeClr val="accent1"/>
                 </a:solidFill>
               </a:rPr>
-              <a:t>Resultados Quantitativos (Escala Likert) e Depoimentos dos Colaboradores da Performa Energy</a:t>
+              <a:t>Planejamento da avaliação: instrumento, metas e focos de coleta</a:t>
             </a:r>
           </a:p>
         </p:txBody>
@@ -7315,14 +7155,16 @@
           </a:bodyPr>
           <a:lstStyle/>
           <a:p>
-            <a:pPr/>
+            <a:pPr>
+              <a:buNone/>
+            </a:pPr>
             <a:r>
               <a:rPr lang="pt-BR" sz="2400" b="1">
                 <a:solidFill>
                   <a:srgbClr val="A33D6B"/>
                 </a:solidFill>
               </a:rPr>
-              <a:t>REFERÊNCIAS BIBLIOGRÁFICAS</a:t>
+              <a:t>REFERÊNCIAS</a:t>
             </a:r>
           </a:p>
         </p:txBody>
@@ -7431,8 +7273,8 @@
         </p:nvSpPr>
         <p:spPr>
           <a:xfrm>
-            <a:off x="1229187" y="1033692"/>
-            <a:ext cx="9591673" cy="400110"/>
+            <a:off x="1219200" y="965200"/>
+            <a:ext cx="9588500" cy="393700"/>
           </a:xfrm>
           <a:prstGeom prst="rect">
             <a:avLst/>
@@ -7445,14 +7287,16 @@
           </a:bodyPr>
           <a:lstStyle/>
           <a:p>
-            <a:pPr/>
-            <a:r>
-              <a:rPr lang="pt-BR" sz="1500" b="1">
+            <a:pPr>
+              <a:buNone/>
+            </a:pPr>
+            <a:r>
+              <a:rPr lang="pt-BR" sz="1600" b="1">
                 <a:solidFill>
                   <a:schemeClr val="accent1"/>
                 </a:solidFill>
               </a:rPr>
-              <a:t>Normatização Rigorosa Conforme ABNT NBR 6023</a:t>
+              <a:t>Referências conforme a ABNT NBR 6023:2018 (Emenda 1:2020)</a:t>
             </a:r>
           </a:p>
         </p:txBody>
@@ -7471,8 +7315,8 @@
         </p:nvSpPr>
         <p:spPr>
           <a:xfrm>
-            <a:off x="1906724" y="1477638"/>
-            <a:ext cx="9321053" cy="4533421"/>
+            <a:off x="889000" y="1371600"/>
+            <a:ext cx="10541000" cy="4699000"/>
           </a:xfrm>
           <a:prstGeom prst="rect">
             <a:avLst/>
@@ -7485,194 +7329,419 @@
           </a:bodyPr>
           <a:lstStyle/>
           <a:p>
-            <a:pPr/>
-            <a:r>
-              <a:rPr lang="pt-BR" sz="950" b="0">
+            <a:pPr>
+              <a:spcBef>
+                <a:spcPts val="0"/>
+              </a:spcBef>
+              <a:buNone/>
+            </a:pPr>
+            <a:r>
+              <a:rPr lang="pt-BR" sz="1050" b="0">
                 <a:solidFill>
                   <a:srgbClr val="262626"/>
                 </a:solidFill>
               </a:rPr>
-              <a:t>AGÊNCIA NACIONAL DE ENERGIA ELÉTRICA (Brasil). Resolução Normativa ANEEL nº 1.000, de 7 de dezembro de 2021. Regras de Prestação do Serviço Público de Distribuição de Energia Elétrica. Diário Oficial da União: Brasília, DF, 20 dez. 2021.</a:t>
+              <a:t>BRASIL. Agência Nacional de Energia Elétrica. </a:t>
+            </a:r>
+            <a:r>
+              <a:rPr lang="pt-BR" sz="1050" b="1">
+                <a:solidFill>
+                  <a:srgbClr val="262626"/>
+                </a:solidFill>
+              </a:rPr>
+              <a:t>Resolução Normativa nº 1.000, de 7 de dezembro de 2021</a:t>
+            </a:r>
+            <a:r>
+              <a:rPr lang="pt-BR" sz="1050" b="0">
+                <a:solidFill>
+                  <a:srgbClr val="262626"/>
+                </a:solidFill>
+              </a:rPr>
+              <a:t>. Estabelece as regras de prestação do serviço público de distribuição de energia elétrica. Diário Oficial da União: seção 1, Brasília, DF, 20 dez. 2021.</a:t>
             </a:r>
           </a:p>
           <a:p>
             <a:pPr>
-              <a:spcBfr>
-                <a:spcPts val="60"/>
-              </a:spcBfr>
-            </a:pPr>
-            <a:r>
-              <a:rPr lang="pt-BR" sz="950" b="0">
+              <a:spcBef>
+                <a:spcPts val="140"/>
+              </a:spcBef>
+              <a:buNone/>
+            </a:pPr>
+            <a:r>
+              <a:rPr lang="pt-BR" sz="1050" b="0">
                 <a:solidFill>
                   <a:srgbClr val="262626"/>
                 </a:solidFill>
               </a:rPr>
-              <a:t>BRASIL. Ministério da Ciência, Tecnologia e Inovações. Estratégia Brasileira de Inteligência Artificial (EBIA). Brasília, DF: MCTI, 2021. 76 p.</a:t>
+              <a:t>BRASIL. </a:t>
+            </a:r>
+            <a:r>
+              <a:rPr lang="pt-BR" sz="1050" b="1">
+                <a:solidFill>
+                  <a:srgbClr val="262626"/>
+                </a:solidFill>
+              </a:rPr>
+              <a:t>Lei nº 13.709, de 14 de agosto de 2018</a:t>
+            </a:r>
+            <a:r>
+              <a:rPr lang="pt-BR" sz="1050" b="0">
+                <a:solidFill>
+                  <a:srgbClr val="262626"/>
+                </a:solidFill>
+              </a:rPr>
+              <a:t>. Lei Geral de Proteção de Dados Pessoais (LGPD). Diário Oficial da União: seção 1, Brasília, DF, 15 ago. 2018.</a:t>
             </a:r>
           </a:p>
           <a:p>
             <a:pPr>
-              <a:spcBfr>
-                <a:spcPts val="60"/>
-              </a:spcBfr>
-            </a:pPr>
-            <a:r>
-              <a:rPr lang="pt-BR" sz="950" b="0">
+              <a:spcBef>
+                <a:spcPts val="140"/>
+              </a:spcBef>
+              <a:buNone/>
+            </a:pPr>
+            <a:r>
+              <a:rPr lang="pt-BR" sz="1050" b="0">
                 <a:solidFill>
                   <a:srgbClr val="262626"/>
                 </a:solidFill>
               </a:rPr>
-              <a:t>BRASIL. Ministério da Educação. Conselho Nacional de Educação. Resolução nº 7, de 18 de dezembro de 2018. Diretrizes para a Extensão na Educação Superior Brasileira. Diário Oficial da União: Brasília, DF, 19 dez. 2018.</a:t>
+              <a:t>BRASIL. </a:t>
+            </a:r>
+            <a:r>
+              <a:rPr lang="pt-BR" sz="1050" b="1">
+                <a:solidFill>
+                  <a:srgbClr val="262626"/>
+                </a:solidFill>
+              </a:rPr>
+              <a:t>Lei nº 14.300, de 6 de janeiro de 2022</a:t>
+            </a:r>
+            <a:r>
+              <a:rPr lang="pt-BR" sz="1050" b="0">
+                <a:solidFill>
+                  <a:srgbClr val="262626"/>
+                </a:solidFill>
+              </a:rPr>
+              <a:t>. Institui o marco legal da microgeração e minigeração distribuída. Diário Oficial da União: seção 1, Brasília, DF, 7 jan. 2022.</a:t>
             </a:r>
           </a:p>
           <a:p>
             <a:pPr>
-              <a:spcBfr>
-                <a:spcPts val="60"/>
-              </a:spcBfr>
-            </a:pPr>
-            <a:r>
-              <a:rPr lang="pt-BR" sz="950" b="0">
+              <a:spcBef>
+                <a:spcPts val="140"/>
+              </a:spcBef>
+              <a:buNone/>
+            </a:pPr>
+            <a:r>
+              <a:rPr lang="pt-BR" sz="1050" b="0">
                 <a:solidFill>
                   <a:srgbClr val="262626"/>
                 </a:solidFill>
               </a:rPr>
-              <a:t>BRASIL. Presidência da República. Lei nº 13.709, de 14 de agosto de 2018. Lei Geral de Proteção de Dados Pessoais (LGPD). Diário Oficial da União: Brasília, DF, 15 ago. 2018.</a:t>
+              <a:t>CODD, E. F. A relational model of data for large shared data banks. </a:t>
+            </a:r>
+            <a:r>
+              <a:rPr lang="pt-BR" sz="1050" b="1">
+                <a:solidFill>
+                  <a:srgbClr val="262626"/>
+                </a:solidFill>
+              </a:rPr>
+              <a:t>Communications of the ACM</a:t>
+            </a:r>
+            <a:r>
+              <a:rPr lang="pt-BR" sz="1050" b="0">
+                <a:solidFill>
+                  <a:srgbClr val="262626"/>
+                </a:solidFill>
+              </a:rPr>
+              <a:t>, New York, v. 13, n. 6, p. 377-387, jun. 1970.</a:t>
             </a:r>
           </a:p>
           <a:p>
             <a:pPr>
-              <a:spcBfr>
-                <a:spcPts val="60"/>
-              </a:spcBfr>
-            </a:pPr>
-            <a:r>
-              <a:rPr lang="pt-BR" sz="950" b="0">
+              <a:spcBef>
+                <a:spcPts val="140"/>
+              </a:spcBef>
+              <a:buNone/>
+            </a:pPr>
+            <a:r>
+              <a:rPr lang="pt-BR" sz="1050" b="0">
                 <a:solidFill>
                   <a:srgbClr val="262626"/>
                 </a:solidFill>
               </a:rPr>
-              <a:t>BRASIL. Presidência da República. Lei nº 14.300, de 6 de janeiro de 2022. Institui o marco legal da microgeração e minigeração distribuída. Diário Oficial da União: Brasília, DF, 7 jan. 2022.</a:t>
+              <a:t>DATE, C. J. </a:t>
+            </a:r>
+            <a:r>
+              <a:rPr lang="pt-BR" sz="1050" b="1">
+                <a:solidFill>
+                  <a:srgbClr val="262626"/>
+                </a:solidFill>
+              </a:rPr>
+              <a:t>Introdução a sistemas de bancos de dados</a:t>
+            </a:r>
+            <a:r>
+              <a:rPr lang="pt-BR" sz="1050" b="0">
+                <a:solidFill>
+                  <a:srgbClr val="262626"/>
+                </a:solidFill>
+              </a:rPr>
+              <a:t>. 8. ed. Rio de Janeiro: Elsevier, 2004.</a:t>
             </a:r>
           </a:p>
           <a:p>
             <a:pPr>
-              <a:spcBfr>
-                <a:spcPts val="60"/>
-              </a:spcBfr>
-            </a:pPr>
-            <a:r>
-              <a:rPr lang="pt-BR" sz="950" b="0">
+              <a:spcBef>
+                <a:spcPts val="140"/>
+              </a:spcBef>
+              <a:buNone/>
+            </a:pPr>
+            <a:r>
+              <a:rPr lang="pt-BR" sz="1050" b="0">
                 <a:solidFill>
                   <a:srgbClr val="262626"/>
                 </a:solidFill>
               </a:rPr>
-              <a:t>FLORIDI, Luciano. The ethics of artificial intelligence: principles, challenges, and opportunities. Oxford: Oxford University Press, 2023. 272 p.</a:t>
+              <a:t>ELMASRI, Ramez; NAVATHE, Shamkant B. </a:t>
+            </a:r>
+            <a:r>
+              <a:rPr lang="pt-BR" sz="1050" b="1">
+                <a:solidFill>
+                  <a:srgbClr val="262626"/>
+                </a:solidFill>
+              </a:rPr>
+              <a:t>Sistemas de banco de dados</a:t>
+            </a:r>
+            <a:r>
+              <a:rPr lang="pt-BR" sz="1050" b="0">
+                <a:solidFill>
+                  <a:srgbClr val="262626"/>
+                </a:solidFill>
+              </a:rPr>
+              <a:t>. 7. ed. São Paulo: Pearson, 2018.</a:t>
             </a:r>
           </a:p>
           <a:p>
             <a:pPr>
-              <a:spcBfr>
-                <a:spcPts val="60"/>
-              </a:spcBfr>
-            </a:pPr>
-            <a:r>
-              <a:rPr lang="pt-BR" sz="950" b="0">
+              <a:spcBef>
+                <a:spcPts val="140"/>
+              </a:spcBef>
+              <a:buNone/>
+            </a:pPr>
+            <a:r>
+              <a:rPr lang="pt-BR" sz="1050" b="0">
                 <a:solidFill>
                   <a:srgbClr val="262626"/>
                 </a:solidFill>
               </a:rPr>
-              <a:t>KNOWLES, Malcolm S.; HOLTON III, E. F.; SWANSON, R. A. Aprendizagem de resultados: andragogia corporativa. Rio de Janeiro: Elsevier, 2009. 336 p.</a:t>
+              <a:t>FLORIDI, Luciano. </a:t>
+            </a:r>
+            <a:r>
+              <a:rPr lang="pt-BR" sz="1050" b="1">
+                <a:solidFill>
+                  <a:srgbClr val="262626"/>
+                </a:solidFill>
+              </a:rPr>
+              <a:t>The ethics of artificial intelligence</a:t>
+            </a:r>
+            <a:r>
+              <a:rPr lang="pt-BR" sz="1050" b="0">
+                <a:solidFill>
+                  <a:srgbClr val="262626"/>
+                </a:solidFill>
+              </a:rPr>
+              <a:t>: principles, challenges, and opportunities. Oxford: Oxford University Press, 2023.</a:t>
             </a:r>
           </a:p>
           <a:p>
             <a:pPr>
-              <a:spcBfr>
-                <a:spcPts val="60"/>
-              </a:spcBfr>
-            </a:pPr>
-            <a:r>
-              <a:rPr lang="pt-BR" sz="950" b="0">
+              <a:spcBef>
+                <a:spcPts val="140"/>
+              </a:spcBef>
+              <a:buNone/>
+            </a:pPr>
+            <a:r>
+              <a:rPr lang="pt-BR" sz="1050" b="0">
                 <a:solidFill>
                   <a:srgbClr val="262626"/>
                 </a:solidFill>
               </a:rPr>
-              <a:t>MORAN, José; BACICH, Lilian (org.). Metodologias ativas para uma educação inovadora. Porto Alegre: Penso, 2018. 238 p.</a:t>
+              <a:t>KNOWLES, Malcolm S.; HOLTON III, Elwood F.; SWANSON, Richard A. </a:t>
+            </a:r>
+            <a:r>
+              <a:rPr lang="pt-BR" sz="1050" b="1">
+                <a:solidFill>
+                  <a:srgbClr val="262626"/>
+                </a:solidFill>
+              </a:rPr>
+              <a:t>Aprendizagem de resultados</a:t>
+            </a:r>
+            <a:r>
+              <a:rPr lang="pt-BR" sz="1050" b="0">
+                <a:solidFill>
+                  <a:srgbClr val="262626"/>
+                </a:solidFill>
+              </a:rPr>
+              <a:t>: uma abordagem prática para aumentar a efetividade da educação corporativa. Rio de Janeiro: Elsevier, 2009.</a:t>
             </a:r>
           </a:p>
           <a:p>
             <a:pPr>
-              <a:spcBfr>
-                <a:spcPts val="60"/>
-              </a:spcBfr>
-            </a:pPr>
-            <a:r>
-              <a:rPr lang="pt-BR" sz="950" b="0">
+              <a:spcBef>
+                <a:spcPts val="140"/>
+              </a:spcBef>
+              <a:buNone/>
+            </a:pPr>
+            <a:r>
+              <a:rPr lang="pt-BR" sz="1050" b="0">
                 <a:solidFill>
                   <a:srgbClr val="262626"/>
                 </a:solidFill>
               </a:rPr>
-              <a:t>O'NEIL, Cathy. Armas de destruição matemática: como o big data aumenta a desigualdade e ameaça a democracia. Santo André: Editora Rua do Sabão, 2020. 336 p.</a:t>
+              <a:t>META PLATFORMS. </a:t>
+            </a:r>
+            <a:r>
+              <a:rPr lang="pt-BR" sz="1050" b="1">
+                <a:solidFill>
+                  <a:srgbClr val="262626"/>
+                </a:solidFill>
+              </a:rPr>
+              <a:t>WhatsApp Business Platform</a:t>
+            </a:r>
+            <a:r>
+              <a:rPr lang="pt-BR" sz="1050" b="0">
+                <a:solidFill>
+                  <a:srgbClr val="262626"/>
+                </a:solidFill>
+              </a:rPr>
+              <a:t>: Cloud API Reference (Graph API v26.0). Menlo Park: Meta for Developers, 2026. Disponível em: https://developers.facebook.com. Acesso em: 8 out. 2026.</a:t>
             </a:r>
           </a:p>
           <a:p>
             <a:pPr>
-              <a:spcBfr>
-                <a:spcPts val="60"/>
-              </a:spcBfr>
-            </a:pPr>
-            <a:r>
-              <a:rPr lang="pt-BR" sz="950" b="0">
+              <a:spcBef>
+                <a:spcPts val="140"/>
+              </a:spcBef>
+              <a:buNone/>
+            </a:pPr>
+            <a:r>
+              <a:rPr lang="pt-BR" sz="1050" b="0">
                 <a:solidFill>
                   <a:srgbClr val="262626"/>
                 </a:solidFill>
               </a:rPr>
-              <a:t>ORGANIZAÇÃO DAS NAÇÕES UNIDAS. Transformando nosso mundo: a Agenda 2030 para o Desenvolvimento Sustentável. Nova York: ONU, 2015.</a:t>
+              <a:t>O'NEIL, Cathy. </a:t>
+            </a:r>
+            <a:r>
+              <a:rPr lang="pt-BR" sz="1050" b="1">
+                <a:solidFill>
+                  <a:srgbClr val="262626"/>
+                </a:solidFill>
+              </a:rPr>
+              <a:t>Armas de destruição matemática</a:t>
+            </a:r>
+            <a:r>
+              <a:rPr lang="pt-BR" sz="1050" b="0">
+                <a:solidFill>
+                  <a:srgbClr val="262626"/>
+                </a:solidFill>
+              </a:rPr>
+              <a:t>: como o big data aumenta a desigualdade e ameaça a democracia. Santo André: Rua do Sabão, 2020.</a:t>
             </a:r>
           </a:p>
           <a:p>
             <a:pPr>
-              <a:spcBfr>
-                <a:spcPts val="60"/>
-              </a:spcBfr>
-            </a:pPr>
-            <a:r>
-              <a:rPr lang="pt-BR" sz="950" b="0">
+              <a:spcBef>
+                <a:spcPts val="140"/>
+              </a:spcBef>
+              <a:buNone/>
+            </a:pPr>
+            <a:r>
+              <a:rPr lang="pt-BR" sz="1050" b="0">
                 <a:solidFill>
                   <a:srgbClr val="262626"/>
                 </a:solidFill>
               </a:rPr>
-              <a:t>RUSSELL, Stuart; NORVIG, Peter. Inteligência artificial: uma abordagem moderna. 4. ed. Rio de Janeiro: GEN LTC, 2022. 1152 p.</a:t>
+              <a:t>ORGANIZAÇÃO DAS NAÇÕES UNIDAS. </a:t>
+            </a:r>
+            <a:r>
+              <a:rPr lang="pt-BR" sz="1050" b="1">
+                <a:solidFill>
+                  <a:srgbClr val="262626"/>
+                </a:solidFill>
+              </a:rPr>
+              <a:t>Transformando nosso mundo</a:t>
+            </a:r>
+            <a:r>
+              <a:rPr lang="pt-BR" sz="1050" b="0">
+                <a:solidFill>
+                  <a:srgbClr val="262626"/>
+                </a:solidFill>
+              </a:rPr>
+              <a:t>: a Agenda 2030 para o Desenvolvimento Sustentável. Nova York: ONU, 2015. Disponível em: https://brasil.un.org/pt-br/sdgs. Acesso em: 8 out. 2026.</a:t>
             </a:r>
           </a:p>
           <a:p>
             <a:pPr>
-              <a:spcBfr>
-                <a:spcPts val="60"/>
-              </a:spcBfr>
-            </a:pPr>
-            <a:r>
-              <a:rPr lang="pt-BR" sz="950" b="0">
+              <a:spcBef>
+                <a:spcPts val="140"/>
+              </a:spcBef>
+              <a:buNone/>
+            </a:pPr>
+            <a:r>
+              <a:rPr lang="pt-BR" sz="1050" b="0">
                 <a:solidFill>
                   <a:srgbClr val="262626"/>
                 </a:solidFill>
               </a:rPr>
-              <a:t>UNESCO. Recomendação sobre a ética da inteligência artificial. Paris: UNESCO, 2022. 44 p.</a:t>
+              <a:t>RUSSELL, Stuart; NORVIG, Peter. </a:t>
+            </a:r>
+            <a:r>
+              <a:rPr lang="pt-BR" sz="1050" b="1">
+                <a:solidFill>
+                  <a:srgbClr val="262626"/>
+                </a:solidFill>
+              </a:rPr>
+              <a:t>Inteligência artificial</a:t>
+            </a:r>
+            <a:r>
+              <a:rPr lang="pt-BR" sz="1050" b="0">
+                <a:solidFill>
+                  <a:srgbClr val="262626"/>
+                </a:solidFill>
+              </a:rPr>
+              <a:t>: uma abordagem moderna. 4. ed. Rio de Janeiro: GEN LTC, 2022.</a:t>
             </a:r>
           </a:p>
           <a:p>
             <a:pPr>
-              <a:spcBfr>
-                <a:spcPts val="60"/>
-              </a:spcBfr>
-            </a:pPr>
-            <a:r>
-              <a:rPr lang="pt-BR" sz="950" b="0">
+              <a:spcBef>
+                <a:spcPts val="140"/>
+              </a:spcBef>
+              <a:buNone/>
+            </a:pPr>
+            <a:r>
+              <a:rPr lang="pt-BR" sz="1050" b="0">
                 <a:solidFill>
                   <a:srgbClr val="262626"/>
                 </a:solidFill>
               </a:rPr>
-              <a:t>ZUBOFF, Shoshana. A era do capitalismo de vigilância: a luta por um futuro humano na nova fronteira do poder. Rio de Janeiro: Intrínseca, 2020. 800 p.</a:t>
+              <a:t>SILBERSCHATZ, Abraham; KORTH, Henry F.; SUDARSHAN, S. </a:t>
+            </a:r>
+            <a:r>
+              <a:rPr lang="pt-BR" sz="1050" b="1">
+                <a:solidFill>
+                  <a:srgbClr val="262626"/>
+                </a:solidFill>
+              </a:rPr>
+              <a:t>Sistema de banco de dados</a:t>
+            </a:r>
+            <a:r>
+              <a:rPr lang="pt-BR" sz="1050" b="0">
+                <a:solidFill>
+                  <a:srgbClr val="262626"/>
+                </a:solidFill>
+              </a:rPr>
+              <a:t>. 7. ed. Rio de Janeiro: GEN LTC, 2020.</a:t>
             </a:r>
           </a:p>
         </p:txBody>
@@ -7792,8 +7861,8 @@
         </p:nvSpPr>
         <p:spPr>
           <a:xfrm>
-            <a:off x="3626069" y="4607983"/>
-            <a:ext cx="6834552" cy="1077218"/>
+            <a:off x="3327400" y="4508500"/>
+            <a:ext cx="7175500" cy="2222500"/>
           </a:xfrm>
           <a:prstGeom prst="rect">
             <a:avLst/>
@@ -7806,89 +7875,64 @@
           </a:bodyPr>
           <a:lstStyle/>
           <a:p>
-            <a:pPr algn="r"/>
-            <a:r>
-              <a:rPr lang="pt-BR" sz="1600" b="0">
+            <a:pPr algn="r">
+              <a:buNone/>
+            </a:pPr>
+            <a:r>
+              <a:rPr lang="pt-BR" sz="2000" b="1">
                 <a:solidFill>
                   <a:schemeClr val="bg1"/>
                 </a:solidFill>
               </a:rPr>
-              <a:t>Faculdade Unyleya — Educação Superior a Distância</a:t>
+              <a:t>Curso Superior de Tecnologia em Banco de Dados</a:t>
             </a:r>
           </a:p>
           <a:p>
             <a:pPr algn="r">
-              <a:spcBfr>
-                <a:spcPts val="300"/>
-              </a:spcBfr>
-            </a:pPr>
-            <a:r>
-              <a:rPr lang="pt-BR" sz="2200" b="1">
+              <a:spcBef>
+                <a:spcPts val="350"/>
+              </a:spcBef>
+              <a:buNone/>
+            </a:pPr>
+            <a:r>
+              <a:rPr lang="pt-BR" sz="1400" b="0">
                 <a:solidFill>
                   <a:schemeClr val="bg1"/>
                 </a:solidFill>
               </a:rPr>
-              <a:t>Curso Superior de Tecnologia em Banco de Dados</a:t>
+              <a:t>Disciplina: AMBIENTE PROFISSIONAL E DE EXTENSÃO EM BANCO DE DADOS V</a:t>
             </a:r>
           </a:p>
           <a:p>
             <a:pPr algn="r">
-              <a:spcBfr>
-                <a:spcPts val="300"/>
-              </a:spcBfr>
-            </a:pPr>
-            <a:r>
-              <a:rPr lang="pt-BR" sz="1500" b="0">
+              <a:spcBef>
+                <a:spcPts val="450"/>
+              </a:spcBef>
+              <a:buNone/>
+            </a:pPr>
+            <a:r>
+              <a:rPr lang="pt-BR" sz="1300" b="1">
                 <a:solidFill>
                   <a:schemeClr val="bg1"/>
                 </a:solidFill>
               </a:rPr>
-              <a:t>DISCIPLINA: AMBIENTE PROFISSIONAL E DE EXTENSÃO — APEX V (100 HORAS)</a:t>
+              <a:t>TÍTULO DO TRABALHO DE EXTENSÃO:</a:t>
             </a:r>
           </a:p>
           <a:p>
             <a:pPr algn="r">
-              <a:spcBfr>
-                <a:spcPts val="150"/>
-              </a:spcBfr>
-            </a:pPr>
-            <a:r>
-              <a:rPr lang="pt-BR" sz="1400" b="0">
+              <a:spcBef>
+                <a:spcPts val="200"/>
+              </a:spcBef>
+              <a:buNone/>
+            </a:pPr>
+            <a:r>
+              <a:rPr lang="pt-BR" sz="1600" b="1">
                 <a:solidFill>
                   <a:schemeClr val="bg1"/>
                 </a:solidFill>
               </a:rPr>
-              <a:t>Programa de Extensão Universitária: Educando para a Cidadania</a:t>
-            </a:r>
-          </a:p>
-          <a:p>
-            <a:pPr algn="r">
-              <a:spcBfr>
-                <a:spcPts val="500"/>
-              </a:spcBfr>
-            </a:pPr>
-            <a:r>
-              <a:rPr lang="pt-BR" sz="1500" b="1">
-                <a:solidFill>
-                  <a:schemeClr val="bg1"/>
-                </a:solidFill>
-              </a:rPr>
-              <a:t>TÍTULO DO TRABALHO DE EXTENSÃO:</a:t>
-            </a:r>
-          </a:p>
-          <a:p>
-            <a:pPr algn="r">
-              <a:spcBfr>
-                <a:spcPts val="200"/>
-              </a:spcBfr>
-            </a:pPr>
-            <a:r>
-              <a:rPr lang="pt-BR" sz="1900" b="1">
-                <a:solidFill>
-                  <a:schemeClr val="bg1"/>
-                </a:solidFill>
-              </a:rPr>
-              <a:t>Inteligência Artificial, Ética e Governança de Dados na Gestão de Energia Solar: Letramento Digital e Proteção de Dados na Performa Energy</a:t>
+              <a:t>Performalog Atendimento: Agente Inteligente de Cobrança e Arquitetura de Banco de Dados para Gestão de Energia Solar na Performa Energy</a:t>
             </a:r>
           </a:p>
         </p:txBody>
@@ -7937,8 +7981,8 @@
         </p:nvSpPr>
         <p:spPr>
           <a:xfrm>
-            <a:off x="640080" y="3554361"/>
-            <a:ext cx="4243589" cy="2639206"/>
+            <a:off x="508000" y="1206500"/>
+            <a:ext cx="4572000" cy="5080000"/>
           </a:xfrm>
           <a:prstGeom prst="rect">
             <a:avLst/>
@@ -7950,24 +7994,27 @@
           </a:bodyPr>
           <a:lstStyle/>
           <a:p>
-            <a:pPr algn="ctr"/>
+            <a:pPr algn="ctr">
+              <a:buNone/>
+            </a:pPr>
             <a:r>
               <a:rPr lang="pt-BR" sz="1800" b="1">
                 <a:solidFill>
                   <a:srgbClr val="1F497D"/>
                 </a:solidFill>
               </a:rPr>
-              <a:t>PROJETO DE EXTENSÃO UNIVERSITÁRIA — APEX V (TI)</a:t>
+              <a:t>PROJETO DE EXTENSÃO UNIVERSITÁRIA — APEX V (BANCO DE DADOS)</a:t>
             </a:r>
           </a:p>
           <a:p>
             <a:pPr algn="ctr">
-              <a:spcBfr>
-                <a:spcPts val="150"/>
-              </a:spcBfr>
-            </a:pPr>
-            <a:r>
-              <a:rPr lang="pt-BR" sz="1400" b="0">
+              <a:spcBef>
+                <a:spcPts val="400"/>
+              </a:spcBef>
+              <a:buNone/>
+            </a:pPr>
+            <a:r>
+              <a:rPr lang="pt-BR" sz="1600" b="0">
                 <a:solidFill>
                   <a:srgbClr val="595959"/>
                 </a:solidFill>
@@ -7977,92 +8024,66 @@
           </a:p>
           <a:p>
             <a:pPr algn="ctr">
-              <a:spcBfr>
-                <a:spcPts val="300"/>
-              </a:spcBfr>
-            </a:pPr>
-            <a:r>
-              <a:rPr lang="pt-BR" sz="1400" b="1">
+              <a:spcBef>
+                <a:spcPts val="1200"/>
+              </a:spcBef>
+              <a:buNone/>
+            </a:pPr>
+            <a:r>
+              <a:rPr lang="pt-BR" sz="1600" b="0">
+                <a:solidFill>
+                  <a:srgbClr val="262626"/>
+                </a:solidFill>
+              </a:rPr>
+              <a:t>Agradecemos à Performa Energy pela acolhida, pela disponibilização do ambiente do CRM Performalog e pela confiança no projeto.</a:t>
+            </a:r>
+          </a:p>
+          <a:p>
+            <a:pPr algn="ctr">
+              <a:spcBef>
+                <a:spcPts val="800"/>
+              </a:spcBef>
+              <a:buNone/>
+            </a:pPr>
+            <a:r>
+              <a:rPr lang="pt-BR" sz="1600" b="0">
+                <a:solidFill>
+                  <a:srgbClr val="262626"/>
+                </a:solidFill>
+              </a:rPr>
+              <a:t>Agradecemos à Profa. Dra. Carla Corrêa Tavares dos Reis pela orientação ao longo da extensão.</a:t>
+            </a:r>
+          </a:p>
+          <a:p>
+            <a:pPr algn="ctr">
+              <a:spcBef>
+                <a:spcPts val="1200"/>
+              </a:spcBef>
+              <a:buNone/>
+            </a:pPr>
+            <a:r>
+              <a:rPr lang="pt-BR" sz="1600" b="1" i="1">
                 <a:solidFill>
                   <a:srgbClr val="A33D6B"/>
                 </a:solidFill>
               </a:rPr>
-              <a:t>Agradecimentos à Performa Energy:</a:t>
+              <a:t>«Tecnologia de dados e inteligência artificial a serviço da sustentabilidade e da cidadania.»</a:t>
             </a:r>
           </a:p>
           <a:p>
             <a:pPr algn="ctr">
-              <a:spcBfr>
-                <a:spcPts val="150"/>
-              </a:spcBfr>
-            </a:pPr>
-            <a:r>
-              <a:rPr lang="pt-BR" sz="1150" b="0">
-                <a:solidFill>
-                  <a:srgbClr val="333333"/>
-                </a:solidFill>
-              </a:rPr>
-              <a:t>Pela acolhida corporativa exemplar, abertura das equipes técnicas e compromisso contínuo com a sustentabilidade, a transição energética limpa e a inovação tecnológica responsável.</a:t>
-            </a:r>
-          </a:p>
-          <a:p>
-            <a:pPr algn="ctr">
-              <a:spcBfr>
-                <a:spcPts val="250"/>
-              </a:spcBfr>
-            </a:pPr>
-            <a:r>
-              <a:rPr lang="pt-BR" sz="1300" b="1">
+              <a:spcBef>
+                <a:spcPts val="1000"/>
+              </a:spcBef>
+              <a:buNone/>
+            </a:pPr>
+            <a:r>
+              <a:rPr lang="pt-BR" sz="1600" b="1">
                 <a:solidFill>
                   <a:srgbClr val="1F497D"/>
                 </a:solidFill>
               </a:rPr>
-              <a:t>Agradecimentos à Orientação Acadêmica:</a:t>
-            </a:r>
-          </a:p>
-          <a:p>
-            <a:pPr algn="ctr">
-              <a:spcBfr>
-                <a:spcPts val="150"/>
-              </a:spcBfr>
-            </a:pPr>
-            <a:r>
-              <a:rPr lang="pt-BR" sz="1150" b="0">
-                <a:solidFill>
-                  <a:srgbClr val="333333"/>
-                </a:solidFill>
-              </a:rPr>
-              <a:t>À Profa. Dra. Carla Corrêa Tavares dos Reis, pela condução pedagógica e fortalecimento da formação cidadã dos estudantes de Tecnologia da Informação.</a:t>
-            </a:r>
-          </a:p>
-          <a:p>
-            <a:pPr algn="ctr">
-              <a:spcBfr>
-                <a:spcPts val="300"/>
-              </a:spcBfr>
-            </a:pPr>
-            <a:r>
-              <a:rPr lang="pt-BR" sz="1300" b="1" i="1">
-                <a:solidFill>
-                  <a:srgbClr val="0070C0"/>
-                </a:solidFill>
-              </a:rPr>
-              <a:t>«Tecnologia a serviço da sustentabilidade, da ética e da cidadania.»</a:t>
-            </a:r>
-          </a:p>
-          <a:p>
-            <a:pPr algn="ctr">
-              <a:spcBfr>
-                <a:spcPts val="200"/>
-              </a:spcBfr>
-            </a:pPr>
-            <a:r>
-              <a:rPr lang="pt-BR" sz="1200" b="1">
-                <a:solidFill>
-                  <a:srgbClr val="1F497D"/>
-                </a:solidFill>
-              </a:rPr>
-              <a:t>Rafael S. — Discente Extensionista | Ano Letivo: 2026</a:t>
+              <a:t>Rafael Silva — Matrícula 1103239 | 2026</a:t>
             </a:r>
           </a:p>
         </p:txBody>
@@ -8311,8 +8332,8 @@
         </p:nvSpPr>
         <p:spPr>
           <a:xfrm>
-            <a:off x="1026229" y="1360813"/>
-            <a:ext cx="10543729" cy="707886"/>
+            <a:off x="1016000" y="1270000"/>
+            <a:ext cx="10541000" cy="508000"/>
           </a:xfrm>
           <a:prstGeom prst="rect">
             <a:avLst/>
@@ -8325,14 +8346,16 @@
           </a:bodyPr>
           <a:lstStyle/>
           <a:p>
-            <a:pPr/>
-            <a:r>
-              <a:rPr lang="pt-BR" sz="1600" b="1">
+            <a:pPr>
+              <a:buNone/>
+            </a:pPr>
+            <a:r>
+              <a:rPr lang="pt-BR" sz="1800" b="1">
                 <a:solidFill>
                   <a:schemeClr val="accent1"/>
                 </a:solidFill>
               </a:rPr>
-              <a:t>Dados Acadêmicos do Discente Extensionista e Coordenação Docente</a:t>
+              <a:t>Dados acadêmicos do discente extensionista e da orientação docente</a:t>
             </a:r>
           </a:p>
         </p:txBody>
@@ -8365,7 +8388,9 @@
           </a:bodyPr>
           <a:lstStyle/>
           <a:p>
-            <a:pPr/>
+            <a:pPr>
+              <a:buNone/>
+            </a:pPr>
             <a:r>
               <a:rPr lang="pt-BR" sz="2400" b="1">
                 <a:solidFill>
@@ -8491,8 +8516,8 @@
         </p:nvSpPr>
         <p:spPr>
           <a:xfrm>
-            <a:off x="1821858" y="2465032"/>
-            <a:ext cx="9596178" cy="461665"/>
+            <a:off x="1524000" y="2095500"/>
+            <a:ext cx="9652000" cy="762000"/>
           </a:xfrm>
           <a:prstGeom prst="rect">
             <a:avLst/>
@@ -8505,11 +8530,13 @@
           </a:bodyPr>
           <a:lstStyle/>
           <a:p>
-            <a:pPr/>
-            <a:r>
-              <a:rPr lang="pt-BR" sz="1800" b="1">
-                <a:solidFill>
-                  <a:srgbClr val="1F497D"/>
+            <a:pPr>
+              <a:buNone/>
+            </a:pPr>
+            <a:r>
+              <a:rPr lang="pt-BR" sz="2200" b="1">
+                <a:solidFill>
+                  <a:srgbClr val="A33D6B"/>
                 </a:solidFill>
               </a:rPr>
               <a:t>Curso Superior de Tecnologia em Banco de Dados</a:t>
@@ -8517,17 +8544,18 @@
           </a:p>
           <a:p>
             <a:pPr>
-              <a:spcBfr>
-                <a:spcPts val="150"/>
-              </a:spcBfr>
-            </a:pPr>
-            <a:r>
-              <a:rPr lang="pt-BR" sz="1400" b="0">
+              <a:spcBef>
+                <a:spcPts val="400"/>
+              </a:spcBef>
+              <a:buNone/>
+            </a:pPr>
+            <a:r>
+              <a:rPr lang="pt-BR" sz="1600" b="0">
                 <a:solidFill>
                   <a:srgbClr val="595959"/>
                 </a:solidFill>
               </a:rPr>
-              <a:t>Faculdade Unyleya — Carga Horária de Extensão: 100 Horas</a:t>
+              <a:t>Faculdade Unyleya — Carga horária de extensão curricular: 100 horas</a:t>
             </a:r>
           </a:p>
         </p:txBody>
@@ -8546,8 +8574,8 @@
         </p:nvSpPr>
         <p:spPr>
           <a:xfrm>
-            <a:off x="2958253" y="3172042"/>
-            <a:ext cx="7687385" cy="1938992"/>
+            <a:off x="1524000" y="2984500"/>
+            <a:ext cx="9652000" cy="2794000"/>
           </a:xfrm>
           <a:prstGeom prst="rect">
             <a:avLst/>
@@ -8561,66 +8589,69 @@
           <a:lstStyle/>
           <a:p>
             <a:pPr>
-              <a:spcBfr>
-                <a:spcPts val="100"/>
-              </a:spcBfr>
-            </a:pPr>
-            <a:r>
-              <a:rPr lang="pt-BR" sz="1500" b="1">
-                <a:solidFill>
-                  <a:srgbClr val="1F497D"/>
-                </a:solidFill>
-              </a:rPr>
-              <a:t>Discente Extensionista: </a:t>
-            </a:r>
-            <a:r>
-              <a:rPr lang="pt-BR" sz="1500" b="0">
+              <a:spcBef>
+                <a:spcPts val="0"/>
+              </a:spcBef>
+              <a:buNone/>
+            </a:pPr>
+            <a:r>
+              <a:rPr lang="pt-BR" sz="1800" b="1">
+                <a:solidFill>
+                  <a:srgbClr val="A33D6B"/>
+                </a:solidFill>
+              </a:rPr>
+              <a:t>Discente: </a:t>
+            </a:r>
+            <a:r>
+              <a:rPr lang="pt-BR" sz="1800" b="0">
                 <a:solidFill>
                   <a:srgbClr val="262626"/>
                 </a:solidFill>
               </a:rPr>
-              <a:t>Rafael S.</a:t>
+              <a:t>Rafael Silva</a:t>
             </a:r>
           </a:p>
           <a:p>
             <a:pPr>
-              <a:spcBfr>
-                <a:spcPts val="150"/>
-              </a:spcBfr>
-            </a:pPr>
-            <a:r>
-              <a:rPr lang="pt-BR" sz="1400" b="1">
-                <a:solidFill>
-                  <a:srgbClr val="1F497D"/>
-                </a:solidFill>
-              </a:rPr>
-              <a:t>Matrícula / Registro Acadêmico: </a:t>
-            </a:r>
-            <a:r>
-              <a:rPr lang="pt-BR" sz="1400" b="0">
+              <a:spcBef>
+                <a:spcPts val="900"/>
+              </a:spcBef>
+              <a:buNone/>
+            </a:pPr>
+            <a:r>
+              <a:rPr lang="pt-BR" sz="1800" b="1">
+                <a:solidFill>
+                  <a:srgbClr val="A33D6B"/>
+                </a:solidFill>
+              </a:rPr>
+              <a:t>Matrícula: </a:t>
+            </a:r>
+            <a:r>
+              <a:rPr lang="pt-BR" sz="1800" b="0">
                 <a:solidFill>
                   <a:srgbClr val="262626"/>
                 </a:solidFill>
               </a:rPr>
-              <a:t>2024-APEX-TI-UNYLEYA</a:t>
+              <a:t>1103239</a:t>
             </a:r>
           </a:p>
           <a:p>
             <a:pPr>
-              <a:spcBfr>
-                <a:spcPts val="200"/>
-              </a:spcBfr>
-            </a:pPr>
-            <a:r>
-              <a:rPr lang="pt-BR" sz="1400" b="1">
-                <a:solidFill>
-                  <a:srgbClr val="1F497D"/>
-                </a:solidFill>
-              </a:rPr>
-              <a:t>Orientadora e Coordenadora do Curso: </a:t>
-            </a:r>
-            <a:r>
-              <a:rPr lang="pt-BR" sz="1400" b="0">
+              <a:spcBef>
+                <a:spcPts val="900"/>
+              </a:spcBef>
+              <a:buNone/>
+            </a:pPr>
+            <a:r>
+              <a:rPr lang="pt-BR" sz="1800" b="1">
+                <a:solidFill>
+                  <a:srgbClr val="A33D6B"/>
+                </a:solidFill>
+              </a:rPr>
+              <a:t>Orientadora e coordenadora do curso: </a:t>
+            </a:r>
+            <a:r>
+              <a:rPr lang="pt-BR" sz="1800" b="0">
                 <a:solidFill>
                   <a:srgbClr val="262626"/>
                 </a:solidFill>
@@ -8630,48 +8661,50 @@
           </a:p>
           <a:p>
             <a:pPr>
-              <a:spcBfr>
-                <a:spcPts val="200"/>
-              </a:spcBfr>
-            </a:pPr>
-            <a:r>
-              <a:rPr lang="pt-BR" sz="1400" b="1">
-                <a:solidFill>
-                  <a:srgbClr val="1F497D"/>
-                </a:solidFill>
-              </a:rPr>
-              <a:t>Local de Aplicação da Extensão: </a:t>
-            </a:r>
-            <a:r>
-              <a:rPr lang="pt-BR" sz="1400" b="0">
+              <a:spcBef>
+                <a:spcPts val="900"/>
+              </a:spcBef>
+              <a:buNone/>
+            </a:pPr>
+            <a:r>
+              <a:rPr lang="pt-BR" sz="1800" b="1">
+                <a:solidFill>
+                  <a:srgbClr val="A33D6B"/>
+                </a:solidFill>
+              </a:rPr>
+              <a:t>Local de aplicação: </a:t>
+            </a:r>
+            <a:r>
+              <a:rPr lang="pt-BR" sz="1800" b="0">
                 <a:solidFill>
                   <a:srgbClr val="262626"/>
                 </a:solidFill>
               </a:rPr>
-              <a:t>Performa Energy (Gestão de Créditos de Energia Solar)</a:t>
+              <a:t>Performa Energy (gestão de créditos de energia solar e CRM Performalog)</a:t>
             </a:r>
           </a:p>
           <a:p>
             <a:pPr>
-              <a:spcBfr>
-                <a:spcPts val="150"/>
-              </a:spcBfr>
-            </a:pPr>
-            <a:r>
-              <a:rPr lang="pt-BR" sz="1300" b="1">
-                <a:solidFill>
-                  <a:srgbClr val="595959"/>
-                </a:solidFill>
-              </a:rPr>
-              <a:t>Modalidade da Intervenção: </a:t>
-            </a:r>
-            <a:r>
-              <a:rPr lang="pt-BR" sz="1300" b="0">
-                <a:solidFill>
-                  <a:srgbClr val="595959"/>
-                </a:solidFill>
-              </a:rPr>
-              <a:t>Presencial na Sede Corporativa com Workshop Hands-On e Produto Digital Figma</a:t>
+              <a:spcBef>
+                <a:spcPts val="900"/>
+              </a:spcBef>
+              <a:buNone/>
+            </a:pPr>
+            <a:r>
+              <a:rPr lang="pt-BR" sz="1800" b="1">
+                <a:solidFill>
+                  <a:srgbClr val="A33D6B"/>
+                </a:solidFill>
+              </a:rPr>
+              <a:t>Modalidade: </a:t>
+            </a:r>
+            <a:r>
+              <a:rPr lang="pt-BR" sz="1800" b="0">
+                <a:solidFill>
+                  <a:srgbClr val="262626"/>
+                </a:solidFill>
+              </a:rPr>
+              <a:t>presencial, na sede da empresa, com oficina técnica de Banco de Dados, IA e protótipo no Figma</a:t>
             </a:r>
           </a:p>
         </p:txBody>
@@ -8791,14 +8824,16 @@
           </a:bodyPr>
           <a:lstStyle/>
           <a:p>
-            <a:pPr/>
+            <a:pPr>
+              <a:buNone/>
+            </a:pPr>
             <a:r>
               <a:rPr lang="pt-BR" sz="2000" b="1">
                 <a:solidFill>
                   <a:srgbClr val="A33D6B"/>
                 </a:solidFill>
               </a:rPr>
-              <a:t>OBJETIVO DE DESENVOLVIMENTO SUSTENTÁVEL DO PROJETO EXTENSIONISTA «EDUCANDO PARA A CIDADANIA»</a:t>
+              <a:t>OBJETIVO DE DESENVOLVIMENTO SUSTENTÁVEL DO PROJETO EXTENSIONISTA “EDUCANDO PARA A CIDADANIA”</a:t>
             </a:r>
           </a:p>
         </p:txBody>
@@ -8864,8 +8899,8 @@
         </p:nvSpPr>
         <p:spPr>
           <a:xfrm>
-            <a:off x="1854879" y="1457611"/>
-            <a:ext cx="7065186" cy="400110"/>
+            <a:off x="1854200" y="1270000"/>
+            <a:ext cx="9398000" cy="393700"/>
           </a:xfrm>
           <a:prstGeom prst="rect">
             <a:avLst/>
@@ -8878,14 +8913,16 @@
           </a:bodyPr>
           <a:lstStyle/>
           <a:p>
-            <a:pPr/>
-            <a:r>
-              <a:rPr lang="pt-BR" sz="1600" b="1">
+            <a:pPr>
+              <a:buNone/>
+            </a:pPr>
+            <a:r>
+              <a:rPr lang="pt-BR" sz="1800" b="1">
                 <a:solidFill>
                   <a:schemeClr val="accent1"/>
                 </a:solidFill>
               </a:rPr>
-              <a:t>Disciplina Curricular e Ementa Oficial (Resolução CNE/CES MEC nº 7/2018)</a:t>
+              <a:t>Disciplina e ementa oficial (Resolução CNE/CES MEC nº 7/2018)</a:t>
             </a:r>
           </a:p>
         </p:txBody>
@@ -8904,8 +8941,8 @@
         </p:nvSpPr>
         <p:spPr>
           <a:xfrm>
-            <a:off x="2058557" y="1857721"/>
-            <a:ext cx="8689515" cy="4093428"/>
+            <a:off x="1397000" y="1879600"/>
+            <a:ext cx="9906000" cy="4318000"/>
           </a:xfrm>
           <a:prstGeom prst="rect">
             <a:avLst/>
@@ -8918,89 +8955,87 @@
           </a:bodyPr>
           <a:lstStyle/>
           <a:p>
-            <a:pPr/>
-            <a:r>
-              <a:rPr lang="pt-BR" sz="1400" b="1">
-                <a:solidFill>
-                  <a:srgbClr val="1F497D"/>
-                </a:solidFill>
-              </a:rPr>
-              <a:t>DISCIPLINA:</a:t>
-            </a:r>
-          </a:p>
-          <a:p>
             <a:pPr>
-              <a:spcBfr>
-                <a:spcPts val="100"/>
-              </a:spcBfr>
-            </a:pPr>
-            <a:r>
-              <a:rPr lang="pt-BR" sz="1300" b="0">
-                <a:solidFill>
-                  <a:srgbClr val="262626"/>
-                </a:solidFill>
-              </a:rPr>
-              <a:t>AMBIENTE PROFISSIONAL E DE EXTENSÃO — APEX V (Cursos de T.I. — 100 horas)</a:t>
+              <a:buNone/>
+            </a:pPr>
+            <a:r>
+              <a:rPr lang="pt-BR" sz="1600" b="1">
+                <a:solidFill>
+                  <a:srgbClr val="000000"/>
+                </a:solidFill>
+              </a:rPr>
+              <a:t>Disciplina:</a:t>
             </a:r>
           </a:p>
           <a:p>
             <a:pPr>
-              <a:spcBfr>
-                <a:spcPts val="250"/>
-              </a:spcBfr>
-            </a:pPr>
-            <a:r>
-              <a:rPr lang="pt-BR" sz="1400" b="1">
-                <a:solidFill>
-                  <a:srgbClr val="1F497D"/>
-                </a:solidFill>
-              </a:rPr>
-              <a:t>EMENTA OFICIAL INTEGRAL:</a:t>
+              <a:buNone/>
+            </a:pPr>
+            <a:r>
+              <a:rPr lang="pt-BR" sz="1600" b="0">
+                <a:solidFill>
+                  <a:srgbClr val="000000"/>
+                </a:solidFill>
+              </a:rPr>
+              <a:t>AMBIENTE PROFISSIONAL E DE EXTENSÃO EM BANCO DE DADOS V</a:t>
             </a:r>
           </a:p>
           <a:p>
             <a:pPr>
-              <a:spcBfr>
-                <a:spcPts val="150"/>
-              </a:spcBfr>
-            </a:pPr>
-            <a:r>
-              <a:rPr lang="pt-BR" sz="1150" b="0" i="1">
-                <a:solidFill>
-                  <a:srgbClr val="333333"/>
-                </a:solidFill>
-              </a:rPr>
-              <a:t>«Problematização de temas conectados com a vida real na sociedade atual para solução por meio de projetos. Estabelecimento de direcionamentos e regras para a realização do desafio. Desenvolvimento de soft skills como trabalho em equipe, resolução de problemas complexos, comunicação, criatividade, entre outros. Tradução dos conhecimentos científicos para a comunidade. Inteligência Artificial: desafios e oportunidades. Programa de Extensão Institucional: Educando para a Cidadania como proposta de diálogo entre a comunidade acadêmica e sociedade. Produção de materiais educacionais com uso das mídias digitais.»</a:t>
+              <a:spcBef>
+                <a:spcPts val="1000"/>
+              </a:spcBef>
+              <a:buNone/>
+            </a:pPr>
+            <a:r>
+              <a:rPr lang="pt-BR" sz="1600" b="1">
+                <a:solidFill>
+                  <a:srgbClr val="000000"/>
+                </a:solidFill>
+              </a:rPr>
+              <a:t>Ementa:</a:t>
+            </a:r>
+          </a:p>
+          <a:p>
+            <a:pPr algn="just">
+              <a:buNone/>
+            </a:pPr>
+            <a:r>
+              <a:rPr lang="pt-BR" sz="1600" b="0">
+                <a:solidFill>
+                  <a:srgbClr val="000000"/>
+                </a:solidFill>
+              </a:rPr>
+              <a:t>Problematização de temas conectados com a vida real na sociedade atual para solução por meio de projetos. Estabelecimento de direcionamentos e regras para a realização do desafio. Desenvolvimento de soft skills como trabalho em equipe, resolução de problemas complexos, comunicação, criatividade, entre outros. Tradução dos conhecimentos científicos para a comunidade. Inteligência Artificial: desafios e oportunidades. Programa de Extensão Institucional como proposta de diálogo entre a comunidade acadêmica e sociedade. Produção de materiais educacionais com uso das mídias digitais.</a:t>
             </a:r>
           </a:p>
           <a:p>
             <a:pPr>
-              <a:spcBfr>
-                <a:spcPts val="250"/>
-              </a:spcBfr>
-            </a:pPr>
-            <a:r>
-              <a:rPr lang="pt-BR" sz="1300" b="1">
-                <a:solidFill>
-                  <a:srgbClr val="1F497D"/>
-                </a:solidFill>
-              </a:rPr>
-              <a:t>ALINHAMENTO NORMATIVO E EXTENSIONISTA:</a:t>
-            </a:r>
-          </a:p>
-          <a:p>
-            <a:pPr>
-              <a:spcBfr>
-                <a:spcPts val="100"/>
-              </a:spcBfr>
-            </a:pPr>
-            <a:r>
-              <a:rPr lang="pt-BR" sz="1100" b="0">
-                <a:solidFill>
-                  <a:srgbClr val="333333"/>
-                </a:solidFill>
-              </a:rPr>
-              <a:t>O projeto atende integralmente às diretrizes da Resolução CNE/CES MEC nº 7/2018, vinculando o conhecimento científico de Tecnologia da Informação às demandas reais da comunidade corporativa da Performa Energy, promovendo inovação sustentável, proteção de dados sob a LGPD e letramento em IA.</a:t>
+              <a:spcBef>
+                <a:spcPts val="1000"/>
+              </a:spcBef>
+              <a:buNone/>
+            </a:pPr>
+            <a:r>
+              <a:rPr lang="pt-BR" sz="1600" b="1">
+                <a:solidFill>
+                  <a:srgbClr val="000000"/>
+                </a:solidFill>
+              </a:rPr>
+              <a:t>Alinhamento ao curso:</a:t>
+            </a:r>
+          </a:p>
+          <a:p>
+            <a:pPr algn="just">
+              <a:buNone/>
+            </a:pPr>
+            <a:r>
+              <a:rPr lang="pt-BR" sz="1600" b="0">
+                <a:solidFill>
+                  <a:srgbClr val="000000"/>
+                </a:solidFill>
+              </a:rPr>
+              <a:t>O projeto leva à Performa Energy conhecimentos de modelagem relacional, integridade de dados, integração de APIs e IA responsável, criando uma base confiável e auditável para atendimento e cobrança.</a:t>
             </a:r>
           </a:p>
         </p:txBody>
@@ -9120,14 +9155,16 @@
           </a:bodyPr>
           <a:lstStyle/>
           <a:p>
-            <a:pPr/>
+            <a:pPr>
+              <a:buNone/>
+            </a:pPr>
             <a:r>
               <a:rPr lang="pt-BR" sz="2000" b="1">
                 <a:solidFill>
                   <a:srgbClr val="A33D6B"/>
                 </a:solidFill>
               </a:rPr>
-              <a:t>OBJETIVO DE DESENVOLVIMENTO SUSTENTÁVEL DO PROJETO EXTENSIONISTA «EDUCANDO PARA A CIDADANIA»</a:t>
+              <a:t>OBJETIVO DE DESENVOLVIMENTO SUSTENTÁVEL DO PROJETO EXTENSIONISTA “EDUCANDO PARA A CIDADANIA”</a:t>
             </a:r>
           </a:p>
         </p:txBody>
@@ -9193,8 +9230,8 @@
         </p:nvSpPr>
         <p:spPr>
           <a:xfrm>
-            <a:off x="785553" y="2053270"/>
-            <a:ext cx="8138639" cy="4237827"/>
+            <a:off x="774700" y="1714500"/>
+            <a:ext cx="8255000" cy="4445000"/>
           </a:xfrm>
           <a:prstGeom prst="rect">
             <a:avLst/>
@@ -9207,103 +9244,103 @@
           </a:bodyPr>
           <a:lstStyle/>
           <a:p>
-            <a:pPr>
+            <a:pPr marL="285750" indent="-285750">
+              <a:spcBef>
+                <a:spcPts val="0"/>
+              </a:spcBef>
               <a:buFontTx/>
               <a:buChar char="•"/>
-              <a:spcBfr>
-                <a:spcPts val="100"/>
-              </a:spcBfr>
-            </a:pPr>
-            <a:r>
-              <a:rPr lang="pt-BR" sz="1200" b="1">
-                <a:solidFill>
-                  <a:srgbClr val="C68B59"/>
-                </a:solidFill>
-              </a:rPr>
-              <a:t>ODS 7 — ENERGIA LIMPA E ACESSÍVEL (Metas 7.2 e 7.b): </a:t>
-            </a:r>
-            <a:r>
-              <a:rPr lang="pt-BR" sz="1100" b="0">
+            </a:pPr>
+            <a:r>
+              <a:rPr lang="pt-BR" sz="1600" b="1">
+                <a:solidFill>
+                  <a:srgbClr val="A33D6B"/>
+                </a:solidFill>
+              </a:rPr>
+              <a:t>ODS 7 — Energia limpa e acessível (metas 7.2 e 7.b): </a:t>
+            </a:r>
+            <a:r>
+              <a:rPr lang="pt-BR" sz="1600" b="0">
                 <a:solidFill>
                   <a:srgbClr val="262626"/>
                 </a:solidFill>
               </a:rPr>
-              <a:t>Apoio à expansão da geração distribuída fotovoltaica (Lei 14.300/2022). O projeto capacita a equipe para o uso transparente de IA na simulação de economia e compensação de créditos solares, eliminando distorções tarifárias e custos ocultos para os consumidores.</a:t>
-            </a:r>
-          </a:p>
-          <a:p>
-            <a:pPr>
+              <a:t>estimula a geração solar distribuída (Lei nº 14.300/2022); o projeto organiza dados de faturamento e de créditos (kWh) para o cliente entender o benefício da assinatura.</a:t>
+            </a:r>
+          </a:p>
+          <a:p>
+            <a:pPr marL="285750" indent="-285750">
+              <a:spcBef>
+                <a:spcPts val="700"/>
+              </a:spcBef>
               <a:buFontTx/>
               <a:buChar char="•"/>
-              <a:spcBfr>
-                <a:spcPts val="150"/>
-              </a:spcBfr>
-            </a:pPr>
-            <a:r>
-              <a:rPr lang="pt-BR" sz="1200" b="1">
-                <a:solidFill>
-                  <a:srgbClr val="E65100"/>
-                </a:solidFill>
-              </a:rPr>
-              <a:t>ODS 9 — INDÚSTRIA, INOVAÇÃO E INFRAESTRUTURA (Metas 9.4 e 9.5): </a:t>
-            </a:r>
-            <a:r>
-              <a:rPr lang="pt-BR" sz="1100" b="0">
+            </a:pPr>
+            <a:r>
+              <a:rPr lang="pt-BR" sz="1600" b="1">
+                <a:solidFill>
+                  <a:srgbClr val="A33D6B"/>
+                </a:solidFill>
+              </a:rPr>
+              <a:t>ODS 9 — Indústria, inovação e infraestrutura (metas 9.4 e 9.5): </a:t>
+            </a:r>
+            <a:r>
+              <a:rPr lang="pt-BR" sz="1600" b="0">
                 <a:solidFill>
                   <a:srgbClr val="262626"/>
                 </a:solidFill>
               </a:rPr>
-              <a:t>Modernização dos processos analíticos da Performa Energy mediante adoção responsável de inteligência artificial, OCR auditado para faturas e governança rigorosa contra o uso desregrado de ferramentas não homologadas (Shadow AI).</a:t>
-            </a:r>
-          </a:p>
-          <a:p>
-            <a:pPr>
+              <a:t>moderniza a TI da Performa Energy com a WhatsApp Cloud API oficial e a modelagem relacional de mensageria integrada ao CRM Performalog.</a:t>
+            </a:r>
+          </a:p>
+          <a:p>
+            <a:pPr marL="285750" indent="-285750">
+              <a:spcBef>
+                <a:spcPts val="700"/>
+              </a:spcBef>
               <a:buFontTx/>
               <a:buChar char="•"/>
-              <a:spcBfr>
-                <a:spcPts val="150"/>
-              </a:spcBfr>
-            </a:pPr>
-            <a:r>
-              <a:rPr lang="pt-BR" sz="1200" b="1">
-                <a:solidFill>
-                  <a:srgbClr val="2E7D32"/>
-                </a:solidFill>
-              </a:rPr>
-              <a:t>ODS 13 — AÇÃO CONTRA A MUDANÇA GLOBAL DO CLIMA (Meta 13.3): </a:t>
-            </a:r>
-            <a:r>
-              <a:rPr lang="pt-BR" sz="1100" b="0">
+            </a:pPr>
+            <a:r>
+              <a:rPr lang="pt-BR" sz="1600" b="1">
+                <a:solidFill>
+                  <a:srgbClr val="A33D6B"/>
+                </a:solidFill>
+              </a:rPr>
+              <a:t>ODS 12 — Consumo e produção responsáveis (meta 12.8): </a:t>
+            </a:r>
+            <a:r>
+              <a:rPr lang="pt-BR" sz="1600" b="0">
                 <a:solidFill>
                   <a:srgbClr val="262626"/>
                 </a:solidFill>
               </a:rPr>
-              <a:t>Fortalecimento da capacidade institucional de empresa dedicada à transição da matriz fóssil para energia solar renovável. O ganho de eficiência no faturamento solar impulsiona diretamente a redução de emissões de CO2.</a:t>
-            </a:r>
-          </a:p>
-          <a:p>
-            <a:pPr>
+              <a:t>dá transparência ao faturamento da compensação, com acesso claro ao consumo, aos créditos e à composição tarifária.</a:t>
+            </a:r>
+          </a:p>
+          <a:p>
+            <a:pPr marL="285750" indent="-285750">
+              <a:spcBef>
+                <a:spcPts val="700"/>
+              </a:spcBef>
               <a:buFontTx/>
               <a:buChar char="•"/>
-              <a:spcBfr>
-                <a:spcPts val="150"/>
-              </a:spcBfr>
-            </a:pPr>
-            <a:r>
-              <a:rPr lang="pt-BR" sz="1200" b="1">
-                <a:solidFill>
-                  <a:srgbClr val="1F497D"/>
-                </a:solidFill>
-              </a:rPr>
-              <a:t>CONEXÕES TRANSVERSAIS (ODS 4 e ODS 8): </a:t>
-            </a:r>
-            <a:r>
-              <a:rPr lang="pt-BR" sz="1100" b="0">
+            </a:pPr>
+            <a:r>
+              <a:rPr lang="pt-BR" sz="1600" b="1">
+                <a:solidFill>
+                  <a:srgbClr val="A33D6B"/>
+                </a:solidFill>
+              </a:rPr>
+              <a:t>Governança de dados (ODS 16 e LGPD, Lei nº 13.709/2018): </a:t>
+            </a:r>
+            <a:r>
+              <a:rPr lang="pt-BR" sz="1600" b="0">
                 <a:solidFill>
                   <a:srgbClr val="262626"/>
                 </a:solidFill>
               </a:rPr>
-              <a:t>Promoção do letramento digital corporativo (ODS 4 - Meta 4.4) e consolidação do trabalho decente assistido por IA com supervisão humana ativa (Human-in-the-Loop - ODS 8).</a:t>
+              <a:t>opt-in/opt-out e agente de IA que não expõe dados de faturas nem inventa valores.</a:t>
             </a:r>
           </a:p>
         </p:txBody>
@@ -9322,8 +9359,8 @@
         </p:nvSpPr>
         <p:spPr>
           <a:xfrm>
-            <a:off x="9190181" y="3572372"/>
-            <a:ext cx="2840227" cy="615553"/>
+            <a:off x="9017000" y="5359400"/>
+            <a:ext cx="2984500" cy="381000"/>
           </a:xfrm>
           <a:prstGeom prst="rect">
             <a:avLst/>
@@ -9336,14 +9373,17 @@
           </a:bodyPr>
           <a:lstStyle/>
           <a:p>
-            <a:pPr algn="ctr"/>
-            <a:r>
-              <a:rPr lang="pt-BR" sz="1100" b="1">
+            <a:pPr algn="ctr">
+              <a:buNone/>
+            </a:pPr>
+            <a:r>
+              <a:rPr lang="pt-BR" sz="1150" b="1">
                 <a:solidFill>
                   <a:schemeClr val="accent1"/>
                 </a:solidFill>
-              </a:rPr>
-              <a:t>Fonte Oficial: https://brasil.un.org/pt-br/sdgs</a:t>
+                <a:hlinkClick r:id="rId4"/>
+              </a:rPr>
+              <a:t>Fonte: https://brasil.un.org/pt-br/sdgs</a:t>
             </a:r>
           </a:p>
         </p:txBody>
@@ -9362,8 +9402,8 @@
         </p:nvSpPr>
         <p:spPr>
           <a:xfrm>
-            <a:off x="1072176" y="1079185"/>
-            <a:ext cx="9812442" cy="707886"/>
+            <a:off x="1066800" y="1066800"/>
+            <a:ext cx="9804400" cy="508000"/>
           </a:xfrm>
           <a:prstGeom prst="rect">
             <a:avLst/>
@@ -9376,14 +9416,16 @@
           </a:bodyPr>
           <a:lstStyle/>
           <a:p>
-            <a:pPr/>
-            <a:r>
-              <a:rPr lang="pt-BR" sz="1500" b="1">
+            <a:pPr>
+              <a:buNone/>
+            </a:pPr>
+            <a:r>
+              <a:rPr lang="pt-BR" sz="1800" b="1">
                 <a:solidFill>
                   <a:schemeClr val="accent1"/>
                 </a:solidFill>
               </a:rPr>
-              <a:t>Tema Gerador: Inteligência Artificial Ética e Governança na Transição Energética (Agenda 2030)</a:t>
+              <a:t>Tema gerador: modelagem de dados, IA responsável e sustentabilidade energética (Agenda 2030)</a:t>
             </a:r>
           </a:p>
         </p:txBody>
@@ -9410,8 +9452,56 @@
         </p:blipFill>
         <p:spPr>
           <a:xfrm>
-            <a:off x="9832917" y="2104176"/>
-            <a:ext cx="1318374" cy="1333616"/>
+            <a:off x="9906000" y="2870200"/>
+            <a:ext cx="1092200" cy="1092200"/>
+          </a:xfrm>
+          <a:prstGeom prst="rect">
+            <a:avLst/>
+          </a:prstGeom>
+        </p:spPr>
+      </p:pic>
+      <p:pic>
+        <p:nvPicPr>
+          <p:cNvPr id="101" name="ODS 7" descr="Ícone da ODS 7 — Energia limpa e acessível"/>
+          <p:cNvPicPr>
+            <a:picLocks noChangeAspect="1"/>
+          </p:cNvPicPr>
+          <p:nvPr/>
+        </p:nvPicPr>
+        <p:blipFill>
+          <a:blip r:embed="rId1001"/>
+          <a:stretch>
+            <a:fillRect/>
+          </a:stretch>
+        </p:blipFill>
+        <p:spPr>
+          <a:xfrm>
+            <a:off x="9906000" y="1651000"/>
+            <a:ext cx="1092200" cy="1092200"/>
+          </a:xfrm>
+          <a:prstGeom prst="rect">
+            <a:avLst/>
+          </a:prstGeom>
+        </p:spPr>
+      </p:pic>
+      <p:pic>
+        <p:nvPicPr>
+          <p:cNvPr id="102" name="ODS 12" descr="Ícone da ODS 12 — Consumo e produção responsáveis"/>
+          <p:cNvPicPr>
+            <a:picLocks noChangeAspect="1"/>
+          </p:cNvPicPr>
+          <p:nvPr/>
+        </p:nvPicPr>
+        <p:blipFill>
+          <a:blip r:embed="rId1002"/>
+          <a:stretch>
+            <a:fillRect/>
+          </a:stretch>
+        </p:blipFill>
+        <p:spPr>
+          <a:xfrm>
+            <a:off x="9906000" y="4089400"/>
+            <a:ext cx="1092200" cy="1092200"/>
           </a:xfrm>
           <a:prstGeom prst="rect">
             <a:avLst/>
@@ -9490,7 +9580,9 @@
           </a:bodyPr>
           <a:lstStyle/>
           <a:p>
-            <a:pPr/>
+            <a:pPr>
+              <a:buNone/>
+            </a:pPr>
             <a:r>
               <a:rPr lang="pt-BR" sz="2400" b="1">
                 <a:solidFill>
@@ -9606,8 +9698,8 @@
         </p:nvSpPr>
         <p:spPr>
           <a:xfrm>
-            <a:off x="1189779" y="1325147"/>
-            <a:ext cx="9812442" cy="707886"/>
+            <a:off x="1181100" y="1206500"/>
+            <a:ext cx="10160000" cy="508000"/>
           </a:xfrm>
           <a:prstGeom prst="rect">
             <a:avLst/>
@@ -9620,14 +9712,16 @@
           </a:bodyPr>
           <a:lstStyle/>
           <a:p>
-            <a:pPr/>
-            <a:r>
-              <a:rPr lang="pt-BR" sz="1500" b="1">
+            <a:pPr>
+              <a:buNone/>
+            </a:pPr>
+            <a:r>
+              <a:rPr lang="pt-BR" sz="1800" b="1">
                 <a:solidFill>
                   <a:schemeClr val="accent1"/>
                 </a:solidFill>
               </a:rPr>
-              <a:t>Caracterização da Empresa Concedente, Espaço Físico e Público Envolvido</a:t>
+              <a:t>Empresa concedente, ambiente de dados e público atendido</a:t>
             </a:r>
           </a:p>
         </p:txBody>
@@ -9646,8 +9740,8 @@
         </p:nvSpPr>
         <p:spPr>
           <a:xfrm>
-            <a:off x="1592019" y="2518128"/>
-            <a:ext cx="9410202" cy="1400383"/>
+            <a:off x="889000" y="1879600"/>
+            <a:ext cx="7239000" cy="4318000"/>
           </a:xfrm>
           <a:prstGeom prst="rect">
             <a:avLst/>
@@ -9660,91 +9754,128 @@
           </a:bodyPr>
           <a:lstStyle/>
           <a:p>
-            <a:pPr/>
-            <a:r>
-              <a:rPr lang="pt-BR" sz="1300" b="1">
-                <a:solidFill>
-                  <a:srgbClr val="1F497D"/>
-                </a:solidFill>
-              </a:rPr>
-              <a:t>Nome da Empresa / Parceira Institucional: </a:t>
-            </a:r>
-            <a:r>
-              <a:rPr lang="pt-BR" sz="1300" b="1">
+            <a:pPr marL="285750" indent="-285750">
+              <a:spcBef>
+                <a:spcPts val="0"/>
+              </a:spcBef>
+              <a:buFontTx/>
+              <a:buChar char="•"/>
+            </a:pPr>
+            <a:r>
+              <a:rPr lang="pt-BR" sz="1600" b="1">
+                <a:solidFill>
+                  <a:srgbClr val="A33D6B"/>
+                </a:solidFill>
+              </a:rPr>
+              <a:t>Empresa e atividade: </a:t>
+            </a:r>
+            <a:r>
+              <a:rPr lang="pt-BR" sz="1600" b="0">
                 <a:solidFill>
                   <a:srgbClr val="262626"/>
                 </a:solidFill>
               </a:rPr>
-              <a:t>Performa Energy</a:t>
-            </a:r>
-          </a:p>
-          <a:p>
-            <a:pPr>
-              <a:spcBfr>
-                <a:spcPts val="100"/>
-              </a:spcBfr>
-            </a:pPr>
-            <a:r>
-              <a:rPr lang="pt-BR" sz="1200" b="1">
-                <a:solidFill>
-                  <a:srgbClr val="1F497D"/>
-                </a:solidFill>
-              </a:rPr>
-              <a:t>Ramo de Atividade e Missão: </a:t>
-            </a:r>
-            <a:r>
-              <a:rPr lang="pt-BR" sz="1100" b="0">
+              <a:t>Consórcio Performa Energy — gestão e distribuição de créditos de energia solar por assinatura na área da CEMIG (Geração Distribuída, Lei nº 14.300/2022).</a:t>
+            </a:r>
+          </a:p>
+          <a:p>
+            <a:pPr marL="285750" indent="-285750">
+              <a:spcBef>
+                <a:spcPts val="700"/>
+              </a:spcBef>
+              <a:buFontTx/>
+              <a:buChar char="•"/>
+            </a:pPr>
+            <a:r>
+              <a:rPr lang="pt-BR" sz="1600" b="1">
+                <a:solidFill>
+                  <a:srgbClr val="A33D6B"/>
+                </a:solidFill>
+              </a:rPr>
+              <a:t>Endereço: </a:t>
+            </a:r>
+            <a:r>
+              <a:rPr lang="pt-BR" sz="1600" b="0">
                 <a:solidFill>
                   <a:srgbClr val="262626"/>
                 </a:solidFill>
               </a:rPr>
-              <a:t>Gestão de créditos de energia solar fotovoltaica, micro e minigeração distribuída (GD) e soluções em eficiência energética sustentável. A empresa atua conectando usinas solares a unidades consumidoras residenciais e comerciais, reduzindo custos de energia e promovendo fontes renováveis (Marco Legal da GD - Lei nº 14.300/2022).</a:t>
-            </a:r>
-          </a:p>
-          <a:p>
-            <a:pPr>
-              <a:spcBfr>
-                <a:spcPts val="150"/>
-              </a:spcBfr>
-            </a:pPr>
-            <a:r>
-              <a:rPr lang="pt-BR" sz="1200" b="1">
-                <a:solidFill>
-                  <a:srgbClr val="1F497D"/>
-                </a:solidFill>
-              </a:rPr>
-              <a:t>Infraestrutura Corporativa e Espaço da Intervenção: </a:t>
-            </a:r>
-            <a:r>
-              <a:rPr lang="pt-BR" sz="1100" b="0">
+              <a:t>Av. Brasil, 888, Sala 1308, Santa Efigênia, Belo Horizonte – MG, CEP 30140-001. CNPJ: 55.845.710/0001-04.</a:t>
+            </a:r>
+          </a:p>
+          <a:p>
+            <a:pPr marL="285750" indent="-285750">
+              <a:spcBef>
+                <a:spcPts val="700"/>
+              </a:spcBef>
+              <a:buFontTx/>
+              <a:buChar char="•"/>
+            </a:pPr>
+            <a:r>
+              <a:rPr lang="pt-BR" sz="1600" b="1">
+                <a:solidFill>
+                  <a:srgbClr val="A33D6B"/>
+                </a:solidFill>
+              </a:rPr>
+              <a:t>Ambiente de dados: </a:t>
+            </a:r>
+            <a:r>
+              <a:rPr lang="pt-BR" sz="1600" b="0">
                 <a:solidFill>
                   <a:srgbClr val="262626"/>
                 </a:solidFill>
               </a:rPr>
-              <a:t>Sede corporativa dotada de infraestrutura de TI, estações de trabalho e Sala de Reuniões Multimídia (equipada com Smart TV de alta resolução para projeção, conexão Wi-Fi 5GHz de alta velocidade, laptops corporativos para testes interativos hands-on e acomodações colaborativas).</a:t>
-            </a:r>
-          </a:p>
-          <a:p>
-            <a:pPr>
-              <a:spcBfr>
-                <a:spcPts val="150"/>
-              </a:spcBfr>
-            </a:pPr>
-            <a:r>
-              <a:rPr lang="pt-BR" sz="1200" b="1">
-                <a:solidFill>
-                  <a:srgbClr val="1F497D"/>
-                </a:solidFill>
-              </a:rPr>
-              <a:t>Público Beneficiário Direto e Indireto: </a:t>
-            </a:r>
-            <a:r>
-              <a:rPr lang="pt-BR" sz="1100" b="0">
+              <a:t>CRM Performalog (MySQL), com relatórios de rateio da CEMIG e faturas da Digital Grid; passará a integrar a WhatsApp Cloud API da Meta.</a:t>
+            </a:r>
+          </a:p>
+          <a:p>
+            <a:pPr marL="285750" indent="-285750">
+              <a:spcBef>
+                <a:spcPts val="700"/>
+              </a:spcBef>
+              <a:buFontTx/>
+              <a:buChar char="•"/>
+            </a:pPr>
+            <a:r>
+              <a:rPr lang="pt-BR" sz="1600" b="1">
+                <a:solidFill>
+                  <a:srgbClr val="A33D6B"/>
+                </a:solidFill>
+              </a:rPr>
+              <a:t>Espaço da intervenção: </a:t>
+            </a:r>
+            <a:r>
+              <a:rPr lang="pt-BR" sz="1600" b="0">
                 <a:solidFill>
                   <a:srgbClr val="262626"/>
                 </a:solidFill>
               </a:rPr>
-              <a:t>Direto: Equipe multidisciplinar de 14 profissionais (Analistas de Faturamento, Consultores Comerciais, Customer Success e Gestores). Indireto: Centenas de consumidores que dependem do faturamento ético e seguro de seus créditos de energia limpa.</a:t>
+              <a:t>sede com rede corporativa, estações de trabalho com acesso ao CRM e sala de reuniões para a capacitação presencial.</a:t>
+            </a:r>
+          </a:p>
+          <a:p>
+            <a:pPr marL="285750" indent="-285750">
+              <a:spcBef>
+                <a:spcPts val="700"/>
+              </a:spcBef>
+              <a:buFontTx/>
+              <a:buChar char="•"/>
+            </a:pPr>
+            <a:r>
+              <a:rPr lang="pt-BR" sz="1600" b="1">
+                <a:solidFill>
+                  <a:srgbClr val="A33D6B"/>
+                </a:solidFill>
+              </a:rPr>
+              <a:t>Público: </a:t>
+            </a:r>
+            <a:r>
+              <a:rPr lang="pt-BR" sz="1600" b="0">
+                <a:solidFill>
+                  <a:srgbClr val="262626"/>
+                </a:solidFill>
+              </a:rPr>
+              <a:t>direto — colaboradores de Atendimento, Cobrança e Operações; indireto — clientes assinantes atendidos via WhatsApp.</a:t>
             </a:r>
           </a:p>
         </p:txBody>
@@ -9799,8 +9930,8 @@
         </p:nvSpPr>
         <p:spPr>
           <a:xfrm>
-            <a:off x="164032" y="2710377"/>
-            <a:ext cx="8827204" cy="461665"/>
+            <a:off x="1117600" y="2730500"/>
+            <a:ext cx="10439400" cy="2413000"/>
           </a:xfrm>
           <a:prstGeom prst="rect">
             <a:avLst/>
@@ -9813,10 +9944,64 @@
           </a:bodyPr>
           <a:lstStyle/>
           <a:p>
-            <a:pPr algn="r"/>
-            <a:r>
-              <a:rPr lang="pt-BR" sz="2400" dirty="0"/>
-              <a:t>	</a:t>
+            <a:pPr algn="ctr">
+              <a:buNone/>
+            </a:pPr>
+            <a:r>
+              <a:rPr lang="pt-BR" sz="2000" b="1">
+                <a:solidFill>
+                  <a:srgbClr val="1F497D"/>
+                </a:solidFill>
+              </a:rPr>
+              <a:t>PROJETO DE EXTENSÃO UNIVERSITÁRIA — APEX V (BANCO DE DADOS)</a:t>
+            </a:r>
+          </a:p>
+          <a:p>
+            <a:pPr algn="ctr">
+              <a:spcBef>
+                <a:spcPts val="900"/>
+              </a:spcBef>
+              <a:buNone/>
+            </a:pPr>
+            <a:r>
+              <a:rPr lang="pt-BR" sz="1800" b="1">
+                <a:solidFill>
+                  <a:srgbClr val="A33D6B"/>
+                </a:solidFill>
+              </a:rPr>
+              <a:t>2ª ETAPA: DESAFIO, PARTICIPANTES E ARQUITETURA DE DADOS (MÓDULO 2)</a:t>
+            </a:r>
+          </a:p>
+          <a:p>
+            <a:pPr algn="ctr">
+              <a:spcBef>
+                <a:spcPts val="500"/>
+              </a:spcBef>
+              <a:buNone/>
+            </a:pPr>
+            <a:r>
+              <a:rPr lang="pt-BR" sz="1600" b="0">
+                <a:solidFill>
+                  <a:srgbClr val="262626"/>
+                </a:solidFill>
+              </a:rPr>
+              <a:t>Slides 8 a 10: participantes, desafio identificado e aprofundamento teórico em modelagem relacional, APIs de mensageria e governança de IA</a:t>
+            </a:r>
+          </a:p>
+          <a:p>
+            <a:pPr algn="ctr">
+              <a:spcBef>
+                <a:spcPts val="700"/>
+              </a:spcBef>
+              <a:buNone/>
+            </a:pPr>
+            <a:r>
+              <a:rPr lang="pt-BR" sz="1600" b="1">
+                <a:solidFill>
+                  <a:srgbClr val="1F497D"/>
+                </a:solidFill>
+              </a:rPr>
+              <a:t>Empresa parceira: Performa Energy | Ano letivo: 2026</a:t>
             </a:r>
           </a:p>
         </p:txBody>
@@ -9851,72 +10036,38 @@
           <a:p>
             <a:pPr algn="ctr"/>
             <a:r>
-              <a:rPr lang="pt-BR" sz="1800" b="1">
-                <a:solidFill>
-                  <a:srgbClr val="1F497D"/>
-                </a:solidFill>
-              </a:rPr>
-              <a:t>PROJETO DE EXTENSÃO UNIVERSITÁRIA — APEX V (TI)</a:t>
-            </a:r>
-          </a:p>
-          <a:p>
-            <a:pPr algn="ctr">
-              <a:spcBfr>
-                <a:spcPts val="250"/>
-              </a:spcBfr>
-            </a:pPr>
-            <a:r>
-              <a:rPr lang="pt-BR" sz="1500" b="1">
-                <a:solidFill>
-                  <a:srgbClr val="A33D6B"/>
-                </a:solidFill>
-              </a:rPr>
-              <a:t>2ª ETAPA: DESAFIO, PARTICIPANTES E APROFUNDAMENTO TEÓRICO (MÓDULO 2)</a:t>
-            </a:r>
-          </a:p>
-          <a:p>
-            <a:pPr algn="ctr">
-              <a:spcBfr>
-                <a:spcPts val="150"/>
-              </a:spcBfr>
-            </a:pPr>
-            <a:r>
-              <a:rPr lang="pt-BR" sz="1300" b="0">
-                <a:solidFill>
-                  <a:srgbClr val="595959"/>
-                </a:solidFill>
-              </a:rPr>
-              <a:t>Envio dos Slides 8 até 10 na Sala Virtual da Unyleya</a:t>
-            </a:r>
-          </a:p>
-          <a:p>
-            <a:pPr algn="ctr">
-              <a:spcBfr>
-                <a:spcPts val="200"/>
-              </a:spcBfr>
-            </a:pPr>
-            <a:r>
-              <a:rPr lang="pt-BR" sz="1200" b="0">
-                <a:solidFill>
-                  <a:srgbClr val="333333"/>
-                </a:solidFill>
-              </a:rPr>
-              <a:t>Foco: Caracterização de Participantes Anonimizados, Diagnóstico de Riscos em IA no Setor Solar e Aprofundamento Teórico em Armas de Destruição Matemática (ADMs - Cathy O'Neil)</a:t>
-            </a:r>
-          </a:p>
-          <a:p>
-            <a:pPr algn="ctr">
-              <a:spcBfr>
-                <a:spcPts val="250"/>
-              </a:spcBfr>
-            </a:pPr>
-            <a:r>
-              <a:rPr lang="pt-BR" sz="1200" b="1">
-                <a:solidFill>
-                  <a:srgbClr val="1F497D"/>
-                </a:solidFill>
-              </a:rPr>
-              <a:t>Empresa Parceira: Performa Energy | Ano Letivo: 2026</a:t>
+              <a:rPr lang="pt-BR" sz="2000" i="1" dirty="0">
+                <a:solidFill>
+                  <a:schemeClr val="accent1"/>
+                </a:solidFill>
+              </a:rPr>
+              <a:t>Preencher do slide 8 até o slide 9 (ou 10).</a:t>
+            </a:r>
+            <a:br>
+              <a:rPr lang="pt-BR" sz="2000" i="1" dirty="0">
+                <a:solidFill>
+                  <a:schemeClr val="accent1"/>
+                </a:solidFill>
+              </a:rPr>
+            </a:br>
+            <a:r>
+              <a:rPr lang="pt-BR" sz="2000" i="1" dirty="0">
+                <a:solidFill>
+                  <a:schemeClr val="accent1"/>
+                </a:solidFill>
+              </a:rPr>
+              <a:t>Após o preenchimento, deverá enviar o arquivo no espaço de envio do Módulo 2 na sala de aula. </a:t>
+            </a:r>
+          </a:p>
+          <a:p>
+            <a:pPr algn="ctr"/>
+            <a:r>
+              <a:rPr lang="pt-BR" sz="2000" i="1" dirty="0">
+                <a:solidFill>
+                  <a:schemeClr val="accent1"/>
+                </a:solidFill>
+              </a:rPr>
+              <a:t> </a:t>
             </a:r>
           </a:p>
         </p:txBody>
@@ -10293,8 +10444,8 @@
         </p:nvSpPr>
         <p:spPr>
           <a:xfrm>
-            <a:off x="1063869" y="1410757"/>
-            <a:ext cx="10744199" cy="707886"/>
+            <a:off x="1054100" y="1206500"/>
+            <a:ext cx="10731500" cy="508000"/>
           </a:xfrm>
           <a:prstGeom prst="rect">
             <a:avLst/>
@@ -10307,14 +10458,16 @@
           </a:bodyPr>
           <a:lstStyle/>
           <a:p>
-            <a:pPr/>
-            <a:r>
-              <a:rPr lang="pt-BR" sz="1500" b="1">
+            <a:pPr>
+              <a:buNone/>
+            </a:pPr>
+            <a:r>
+              <a:rPr lang="pt-BR" sz="1800" b="1">
                 <a:solidFill>
                   <a:schemeClr val="accent1"/>
                 </a:solidFill>
               </a:rPr>
-              <a:t>Quadro Funcional e Setores Envolvidos (Anonimização Estrita Conforme Diretriz Institucional)</a:t>
+              <a:t>Cargos e funções envolvidos, sem menção a nomes (diretriz institucional)</a:t>
             </a:r>
           </a:p>
         </p:txBody>
@@ -10347,14 +10500,16 @@
           </a:bodyPr>
           <a:lstStyle/>
           <a:p>
-            <a:pPr/>
+            <a:pPr>
+              <a:buNone/>
+            </a:pPr>
             <a:r>
               <a:rPr lang="pt-BR" sz="2400" b="1">
                 <a:solidFill>
                   <a:srgbClr val="A33D6B"/>
                 </a:solidFill>
               </a:rPr>
-              <a:t>PARTICIPANTES DA COMUNIDADE CORPORATIVA</a:t>
+              <a:t>PARTICIPANTES</a:t>
             </a:r>
           </a:p>
         </p:txBody>
@@ -10420,8 +10575,8 @@
         </p:nvSpPr>
         <p:spPr>
           <a:xfrm>
-            <a:off x="2232404" y="2411414"/>
-            <a:ext cx="8631918" cy="2569934"/>
+            <a:off x="1270000" y="1905000"/>
+            <a:ext cx="10033000" cy="4191000"/>
           </a:xfrm>
           <a:prstGeom prst="rect">
             <a:avLst/>
@@ -10434,103 +10589,103 @@
           </a:bodyPr>
           <a:lstStyle/>
           <a:p>
-            <a:pPr>
+            <a:pPr marL="285750" indent="-285750">
+              <a:spcBef>
+                <a:spcPts val="0"/>
+              </a:spcBef>
               <a:buFontTx/>
               <a:buChar char="•"/>
-              <a:spcBfr>
-                <a:spcPts val="100"/>
-              </a:spcBfr>
-            </a:pPr>
-            <a:r>
-              <a:rPr lang="pt-BR" sz="1200" b="1">
-                <a:solidFill>
-                  <a:srgbClr val="1F497D"/>
-                </a:solidFill>
-              </a:rPr>
-              <a:t>Analistas de Operações e Faturamento (4 participantes): </a:t>
-            </a:r>
-            <a:r>
-              <a:rPr lang="pt-BR" sz="1100" b="0">
+            </a:pPr>
+            <a:r>
+              <a:rPr lang="pt-BR" sz="1600" b="1">
+                <a:solidFill>
+                  <a:srgbClr val="A33D6B"/>
+                </a:solidFill>
+              </a:rPr>
+              <a:t>Atendimento e Sucesso do Cliente: </a:t>
+            </a:r>
+            <a:r>
+              <a:rPr lang="pt-BR" sz="1600" b="0">
                 <a:solidFill>
                   <a:srgbClr val="262626"/>
                 </a:solidFill>
               </a:rPr>
-              <a:t>Profissionais encarregados da extração de dados de faturas de energia elétrica emitidas por concessionárias (ex: Enel, Cemig, CPFL, Light), conferência de consumo ativo (kWh), tarifas de uso do sistema (TUSD/TE), bandeiras tarifárias e rateio de créditos de energia solar injetada.</a:t>
-            </a:r>
-          </a:p>
-          <a:p>
-            <a:pPr>
+              <a:t>linha de frente do suporte via WhatsApp, dúvidas sobre a cobrança dupla (CEMIG + Performa) e triagem de solicitações e cancelamentos.</a:t>
+            </a:r>
+          </a:p>
+          <a:p>
+            <a:pPr marL="285750" indent="-285750">
+              <a:spcBef>
+                <a:spcPts val="700"/>
+              </a:spcBef>
               <a:buFontTx/>
               <a:buChar char="•"/>
-              <a:spcBfr>
-                <a:spcPts val="150"/>
-              </a:spcBfr>
-            </a:pPr>
-            <a:r>
-              <a:rPr lang="pt-BR" sz="1200" b="1">
-                <a:solidFill>
-                  <a:srgbClr val="1F497D"/>
-                </a:solidFill>
-              </a:rPr>
-              <a:t>Consultores Comerciais e SDRs (5 participantes): </a:t>
-            </a:r>
-            <a:r>
-              <a:rPr lang="pt-BR" sz="1100" b="0">
+            </a:pPr>
+            <a:r>
+              <a:rPr lang="pt-BR" sz="1600" b="1">
+                <a:solidFill>
+                  <a:srgbClr val="A33D6B"/>
+                </a:solidFill>
+              </a:rPr>
+              <a:t>Cobrança e Contas a Receber: </a:t>
+            </a:r>
+            <a:r>
+              <a:rPr lang="pt-BR" sz="1600" b="0">
                 <a:solidFill>
                   <a:srgbClr val="262626"/>
                 </a:solidFill>
               </a:rPr>
-              <a:t>Equipe comercial responsável pela captação de clientes, simulação inicial de economia na conta de luz e esclarecimento do modelo de compensação solar estabelecido pela Lei 14.300/2022.</a:t>
-            </a:r>
-          </a:p>
-          <a:p>
-            <a:pPr>
+              <a:t>recuperação de crédito, negociação de débitos vencidos, réguas de cobrança e acordos via Pix e boleto.</a:t>
+            </a:r>
+          </a:p>
+          <a:p>
+            <a:pPr marL="285750" indent="-285750">
+              <a:spcBef>
+                <a:spcPts val="700"/>
+              </a:spcBef>
               <a:buFontTx/>
               <a:buChar char="•"/>
-              <a:spcBfr>
-                <a:spcPts val="150"/>
-              </a:spcBfr>
-            </a:pPr>
-            <a:r>
-              <a:rPr lang="pt-BR" sz="1200" b="1">
-                <a:solidFill>
-                  <a:srgbClr val="1F497D"/>
-                </a:solidFill>
-              </a:rPr>
-              <a:t>Analistas de Atendimento e Customer Success (3 participantes): </a:t>
-            </a:r>
-            <a:r>
-              <a:rPr lang="pt-BR" sz="1100" b="0">
+            </a:pPr>
+            <a:r>
+              <a:rPr lang="pt-BR" sz="1600" b="1">
+                <a:solidFill>
+                  <a:srgbClr val="A33D6B"/>
+                </a:solidFill>
+              </a:rPr>
+              <a:t>Faturamento e Operações de Energia: </a:t>
+            </a:r>
+            <a:r>
+              <a:rPr lang="pt-BR" sz="1600" b="0">
                 <a:solidFill>
                   <a:srgbClr val="262626"/>
                 </a:solidFill>
               </a:rPr>
-              <a:t>Profissionais da linha de frente que respondem a dúvidas de clientes residenciais e comerciais sobre o demonstrativo de compensação e regras tarifárias da ANEEL.</a:t>
-            </a:r>
-          </a:p>
-          <a:p>
-            <a:pPr>
+              <a:t>rateio mensal de créditos (CEMIG), conciliação de kWh injetados e importação das faturas da Digital Grid.</a:t>
+            </a:r>
+          </a:p>
+          <a:p>
+            <a:pPr marL="285750" indent="-285750">
+              <a:spcBef>
+                <a:spcPts val="700"/>
+              </a:spcBef>
               <a:buFontTx/>
               <a:buChar char="•"/>
-              <a:spcBfr>
-                <a:spcPts val="150"/>
-              </a:spcBfr>
-            </a:pPr>
-            <a:r>
-              <a:rPr lang="pt-BR" sz="1200" b="1">
-                <a:solidFill>
-                  <a:srgbClr val="1F497D"/>
-                </a:solidFill>
-              </a:rPr>
-              <a:t>Liderança e Coordenação Operacional (2 gestores): </a:t>
-            </a:r>
-            <a:r>
-              <a:rPr lang="pt-BR" sz="1100" b="0">
+            </a:pPr>
+            <a:r>
+              <a:rPr lang="pt-BR" sz="1600" b="1">
+                <a:solidFill>
+                  <a:srgbClr val="A33D6B"/>
+                </a:solidFill>
+              </a:rPr>
+              <a:t>TI, Segurança e Operações: </a:t>
+            </a:r>
+            <a:r>
+              <a:rPr lang="pt-BR" sz="1600" b="0">
                 <a:solidFill>
                   <a:srgbClr val="262626"/>
                 </a:solidFill>
               </a:rPr>
-              <a:t>Gestores responsáveis por compliance regulatório, segurança da informação, conformidade com a LGPD e implementação de padrões corporativos de governança tecnológica.</a:t>
+              <a:t>administração do banco MySQL do Performalog, regras de acesso, infraestrutura da API da Meta e conformidade com a LGPD.</a:t>
             </a:r>
           </a:p>
         </p:txBody>
@@ -10593,8 +10748,8 @@
         </p:nvSpPr>
         <p:spPr>
           <a:xfrm>
-            <a:off x="2213918" y="369590"/>
-            <a:ext cx="10073355" cy="830997"/>
+            <a:off x="2209800" y="368300"/>
+            <a:ext cx="7620000" cy="825500"/>
           </a:xfrm>
           <a:prstGeom prst="rect">
             <a:avLst/>
@@ -10607,14 +10762,16 @@
           </a:bodyPr>
           <a:lstStyle/>
           <a:p>
-            <a:pPr/>
+            <a:pPr>
+              <a:buNone/>
+            </a:pPr>
             <a:r>
               <a:rPr lang="pt-BR" sz="2400" b="1">
                 <a:solidFill>
                   <a:srgbClr val="A33D6B"/>
                 </a:solidFill>
               </a:rPr>
-              <a:t>DESAFIO / QUESTÃO PROBLEMA IDENTIFICADA</a:t>
+              <a:t>DESAFIO/ QUESTÃO PROBLEMA IDENTIFICADA</a:t>
             </a:r>
           </a:p>
         </p:txBody>
@@ -10723,8 +10880,8 @@
         </p:nvSpPr>
         <p:spPr>
           <a:xfrm>
-            <a:off x="984739" y="1181534"/>
-            <a:ext cx="10920046" cy="1938992"/>
+            <a:off x="977900" y="1143000"/>
+            <a:ext cx="10909300" cy="508000"/>
           </a:xfrm>
           <a:prstGeom prst="rect">
             <a:avLst/>
@@ -10737,14 +10894,16 @@
           </a:bodyPr>
           <a:lstStyle/>
           <a:p>
-            <a:pPr/>
-            <a:r>
-              <a:rPr lang="pt-BR" sz="1500" b="1">
+            <a:pPr>
+              <a:buNone/>
+            </a:pPr>
+            <a:r>
+              <a:rPr lang="pt-BR" sz="1800" b="1">
                 <a:solidFill>
                   <a:schemeClr val="accent1"/>
                 </a:solidFill>
               </a:rPr>
-              <a:t>Diagnóstico Situacional de Riscos no Uso de IA e Faturas na Performa Energy</a:t>
+              <a:t>Diagnóstico: sobrecarga no atendimento, inadimplência e dados desconectados</a:t>
             </a:r>
           </a:p>
         </p:txBody>
@@ -10763,8 +10922,8 @@
         </p:nvSpPr>
         <p:spPr>
           <a:xfrm>
-            <a:off x="1175983" y="3158469"/>
-            <a:ext cx="10605709" cy="2949525"/>
+            <a:off x="1016000" y="1714500"/>
+            <a:ext cx="10287000" cy="4445000"/>
           </a:xfrm>
           <a:prstGeom prst="rect">
             <a:avLst/>
@@ -10777,103 +10936,103 @@
           </a:bodyPr>
           <a:lstStyle/>
           <a:p>
-            <a:pPr>
+            <a:pPr marL="285750" indent="-285750">
+              <a:spcBef>
+                <a:spcPts val="0"/>
+              </a:spcBef>
               <a:buFontTx/>
               <a:buChar char="•"/>
-              <a:spcBfr>
-                <a:spcPts val="80"/>
-              </a:spcBfr>
-            </a:pPr>
-            <a:r>
-              <a:rPr lang="pt-BR" sz="1200" b="1">
-                <a:solidFill>
-                  <a:srgbClr val="C00000"/>
-                </a:solidFill>
-              </a:rPr>
-              <a:t>1. Extração Automatizada de Faturas e Riscos de Alucinação Numérica: </a:t>
-            </a:r>
-            <a:r>
-              <a:rPr lang="pt-BR" sz="1100" b="0">
+            </a:pPr>
+            <a:r>
+              <a:rPr lang="pt-BR" sz="1600" b="1">
+                <a:solidFill>
+                  <a:srgbClr val="A33D6B"/>
+                </a:solidFill>
+              </a:rPr>
+              <a:t>Sobrecarga no atendimento: </a:t>
+            </a:r>
+            <a:r>
+              <a:rPr lang="pt-BR" sz="1600" b="0">
                 <a:solidFill>
                   <a:srgbClr val="262626"/>
                 </a:solidFill>
               </a:rPr>
-              <a:t>Faturas de concessionárias possuem layouts díspares e tabelas densas. O uso de LLMs e OCRs genéricos sem calibração provocava alucinações tarifárias na leitura de TUSD/TE e tributos (ICMS/PIS/COFINS), gerando simulações incorretas de créditos solares.</a:t>
-            </a:r>
-          </a:p>
-          <a:p>
-            <a:pPr>
+              <a:t>o cliente recebe duas cobranças (CEMIG e Performa Energy) e tem dificuldade de entender o rateio de créditos em kWh, o que gera muitos chamados repetitivos.</a:t>
+            </a:r>
+          </a:p>
+          <a:p>
+            <a:pPr marL="285750" indent="-285750">
+              <a:spcBef>
+                <a:spcPts val="700"/>
+              </a:spcBef>
               <a:buFontTx/>
               <a:buChar char="•"/>
-              <a:spcBfr>
-                <a:spcPts val="120"/>
-              </a:spcBfr>
-            </a:pPr>
-            <a:r>
-              <a:rPr lang="pt-BR" sz="1200" b="1">
-                <a:solidFill>
-                  <a:srgbClr val="C00000"/>
-                </a:solidFill>
-              </a:rPr>
-              <a:t>2. Vulnerabilidade à LGPD e Prática de Shadow AI: </a:t>
-            </a:r>
-            <a:r>
-              <a:rPr lang="pt-BR" sz="1100" b="0">
+            </a:pPr>
+            <a:r>
+              <a:rPr lang="pt-BR" sz="1600" b="1">
+                <a:solidFill>
+                  <a:srgbClr val="A33D6B"/>
+                </a:solidFill>
+              </a:rPr>
+              <a:t>Inadimplência e negociação manual: </a:t>
+            </a:r>
+            <a:r>
+              <a:rPr lang="pt-BR" sz="1600" b="0">
                 <a:solidFill>
                   <a:srgbClr val="262626"/>
                 </a:solidFill>
               </a:rPr>
-              <a:t>Colaboradores utilizavam ferramentas públicas gratuitas de IA para sintetizar faturas, inserindo involuntariamente documentos integrais contendo dados altamente confidenciais (Nome, CPF/CNPJ, endereço residencial completo e histórico de consumo de 12 meses), expondo a empresa a infrações severas à LGPD e multas da ANPD.</a:t>
-            </a:r>
-          </a:p>
-          <a:p>
-            <a:pPr>
+              <a:t>a cobrança dependia de planilhas Excel e de uma ferramenta de mensagens legada (Maxbot), isolada do CRM, com atrasos nos lembretes e pouca rastreabilidade das promessas de pagamento.</a:t>
+            </a:r>
+          </a:p>
+          <a:p>
+            <a:pPr marL="285750" indent="-285750">
+              <a:spcBef>
+                <a:spcPts val="700"/>
+              </a:spcBef>
               <a:buFontTx/>
               <a:buChar char="•"/>
-              <a:spcBfr>
-                <a:spcPts val="120"/>
-              </a:spcBfr>
-            </a:pPr>
-            <a:r>
-              <a:rPr lang="pt-BR" sz="1200" b="1">
-                <a:solidFill>
-                  <a:srgbClr val="C00000"/>
-                </a:solidFill>
-              </a:rPr>
-              <a:t>3. Atendimento com Agentes Descalibrados: </a:t>
-            </a:r>
-            <a:r>
-              <a:rPr lang="pt-BR" sz="1100" b="0">
+            </a:pPr>
+            <a:r>
+              <a:rPr lang="pt-BR" sz="1600" b="1">
+                <a:solidFill>
+                  <a:srgbClr val="A33D6B"/>
+                </a:solidFill>
+              </a:rPr>
+              <a:t>Risco de alucinação e de violação à LGPD: </a:t>
+            </a:r>
+            <a:r>
+              <a:rPr lang="pt-BR" sz="1600" b="0">
                 <a:solidFill>
                   <a:srgbClr val="262626"/>
                 </a:solidFill>
               </a:rPr>
-              <a:t>Risco de chatbots fornecerem orientações falaciosas aos consumidores, como promessas de «isenção de 100% da conta», omitindo a taxa de iluminação pública e o custo de disponibilidade previstos na Lei 14.300/2022 e na Resolução Normativa ANEEL nº 1.000/2021.</a:t>
-            </a:r>
-          </a:p>
-          <a:p>
-            <a:pPr>
+              <a:t>chatbots sem ligação determinística ao banco podem inventar valores, aplicar descontos não autorizados ou expor dados de faturas.</a:t>
+            </a:r>
+          </a:p>
+          <a:p>
+            <a:pPr marL="285750" indent="-285750">
+              <a:spcBef>
+                <a:spcPts val="700"/>
+              </a:spcBef>
               <a:buFontTx/>
               <a:buChar char="•"/>
-              <a:spcBfr>
-                <a:spcPts val="150"/>
-              </a:spcBfr>
-            </a:pPr>
-            <a:r>
-              <a:rPr lang="pt-BR" sz="1200" b="1">
-                <a:solidFill>
-                  <a:srgbClr val="1F497D"/>
-                </a:solidFill>
-              </a:rPr>
-              <a:t>Proposta de Solução: </a:t>
-            </a:r>
-            <a:r>
-              <a:rPr lang="pt-BR" sz="1100" b="0">
+            </a:pPr>
+            <a:r>
+              <a:rPr lang="pt-BR" sz="1600" b="1">
+                <a:solidFill>
+                  <a:srgbClr val="A33D6B"/>
+                </a:solidFill>
+              </a:rPr>
+              <a:t>Solução proposta: </a:t>
+            </a:r>
+            <a:r>
+              <a:rPr lang="pt-BR" sz="1600" b="0">
                 <a:solidFill>
                   <a:srgbClr val="262626"/>
                 </a:solidFill>
               </a:rPr>
-              <a:t>Desenvolvimento de um programa educativo andragógico com protocolo de anonimização prévia, checklist de validação cruzada humana (human-in-the-loop) e entrega do protótipo Figma «Solar AI Ethics &amp; Hub Performa».</a:t>
+              <a:t>módulo «Performalog Atendimento» integrado à WhatsApp Cloud API, com tabelas relacionais wa_* e agente de cobrança ancorado em dados reais do banco (grounding determinístico).</a:t>
             </a:r>
           </a:p>
         </p:txBody>
